--- a/tests/corpus/pptx/generated/text-body.pptx
+++ b/tests/corpus/pptx/generated/text-body.pptx
@@ -9,6 +9,8 @@
     <p:sldId id="257" r:id="rId3"/>
     <p:sldId id="258" r:id="rId4"/>
     <p:sldId id="259" r:id="rId5"/>
+    <p:sldId id="260" r:id="rId6"/>
+    <p:sldId id="261" r:id="rId7"/>
   </p:sldIdLst>
   <p:sldSz cx="12192000" cy="6858000"/>
   <p:notesSz cx="6858000" cy="9144000"/>
@@ -132,7 +134,7 @@
           <p:cNvPr id="2" name="Titel 1">
             <a:extLst>
               <a:ext uri="{FF2B5EF4-FFF2-40B4-BE49-F238E27FC236}">
-                <a16:creationId xmlns:a16="http://schemas.microsoft.com/office/drawing/2014/main" id="{6C303701-7F0C-9A81-8356-E269205BF46D}"/>
+                <a16:creationId xmlns:a16="http://schemas.microsoft.com/office/drawing/2014/main" id="{FA821720-23FF-F1A2-A9EE-2445F1220A12}"/>
               </a:ext>
             </a:extLst>
           </p:cNvPr>
@@ -169,7 +171,7 @@
           <p:cNvPr id="3" name="Untertitel 2">
             <a:extLst>
               <a:ext uri="{FF2B5EF4-FFF2-40B4-BE49-F238E27FC236}">
-                <a16:creationId xmlns:a16="http://schemas.microsoft.com/office/drawing/2014/main" id="{75C360CB-6FAA-415A-E668-EA288B1A2C0E}"/>
+                <a16:creationId xmlns:a16="http://schemas.microsoft.com/office/drawing/2014/main" id="{F9F5B542-1B18-BD8E-5966-037EE1B8619F}"/>
               </a:ext>
             </a:extLst>
           </p:cNvPr>
@@ -239,7 +241,7 @@
           <p:cNvPr id="4" name="Datumsplatzhalter 3">
             <a:extLst>
               <a:ext uri="{FF2B5EF4-FFF2-40B4-BE49-F238E27FC236}">
-                <a16:creationId xmlns:a16="http://schemas.microsoft.com/office/drawing/2014/main" id="{4393F2BC-9FDA-7D80-4D8E-1C23097FB49D}"/>
+                <a16:creationId xmlns:a16="http://schemas.microsoft.com/office/drawing/2014/main" id="{C49C5D16-2C3E-F142-7276-7C52F65153D9}"/>
               </a:ext>
             </a:extLst>
           </p:cNvPr>
@@ -255,7 +257,7 @@
           <a:bodyPr/>
           <a:lstStyle/>
           <a:p>
-            <a:fld id="{5EBFD976-FA35-42A4-AAA1-DE99CA07C9A7}" type="datetimeFigureOut">
+            <a:fld id="{A7EAB04C-8910-4AD3-B609-D6829ABEC16F}" type="datetimeFigureOut">
               <a:rPr lang="de-DE" smtClean="0"/>
               <a:t>08.10.2026</a:t>
             </a:fld>
@@ -268,7 +270,7 @@
           <p:cNvPr id="5" name="Fußzeilenplatzhalter 4">
             <a:extLst>
               <a:ext uri="{FF2B5EF4-FFF2-40B4-BE49-F238E27FC236}">
-                <a16:creationId xmlns:a16="http://schemas.microsoft.com/office/drawing/2014/main" id="{EF571AFF-BFB9-A07B-4161-F8A28AFFEEF1}"/>
+                <a16:creationId xmlns:a16="http://schemas.microsoft.com/office/drawing/2014/main" id="{D63360CB-97A8-3867-59F6-C44288A7D2DA}"/>
               </a:ext>
             </a:extLst>
           </p:cNvPr>
@@ -293,7 +295,7 @@
           <p:cNvPr id="6" name="Foliennummernplatzhalter 5">
             <a:extLst>
               <a:ext uri="{FF2B5EF4-FFF2-40B4-BE49-F238E27FC236}">
-                <a16:creationId xmlns:a16="http://schemas.microsoft.com/office/drawing/2014/main" id="{1E1C7D55-FFB8-C364-F97C-4A90A8480C23}"/>
+                <a16:creationId xmlns:a16="http://schemas.microsoft.com/office/drawing/2014/main" id="{0B3CB250-D7EA-331D-F215-127FDF55C466}"/>
               </a:ext>
             </a:extLst>
           </p:cNvPr>
@@ -309,7 +311,7 @@
           <a:bodyPr/>
           <a:lstStyle/>
           <a:p>
-            <a:fld id="{9B5EE1A3-B506-4AF2-B58B-53550434FE7F}" type="slidenum">
+            <a:fld id="{8B055827-EE37-4425-A60A-F41882E0FFD2}" type="slidenum">
               <a:rPr lang="de-DE" smtClean="0"/>
               <a:t>‹Nr.›</a:t>
             </a:fld>
@@ -320,7 +322,7 @@
     </p:spTree>
     <p:extLst>
       <p:ext uri="{BB962C8B-B14F-4D97-AF65-F5344CB8AC3E}">
-        <p14:creationId xmlns:p14="http://schemas.microsoft.com/office/powerpoint/2010/main" val="3039070500"/>
+        <p14:creationId xmlns:p14="http://schemas.microsoft.com/office/powerpoint/2010/main" val="2385917343"/>
       </p:ext>
     </p:extLst>
   </p:cSld>
@@ -352,7 +354,7 @@
           <p:cNvPr id="2" name="Titel 1">
             <a:extLst>
               <a:ext uri="{FF2B5EF4-FFF2-40B4-BE49-F238E27FC236}">
-                <a16:creationId xmlns:a16="http://schemas.microsoft.com/office/drawing/2014/main" id="{CF0C5C0D-3597-BF50-9FE2-F7E477113BD7}"/>
+                <a16:creationId xmlns:a16="http://schemas.microsoft.com/office/drawing/2014/main" id="{C8C1F964-65EC-1B1C-77B8-06F502AF9BA0}"/>
               </a:ext>
             </a:extLst>
           </p:cNvPr>
@@ -380,7 +382,7 @@
           <p:cNvPr id="3" name="Vertikaler Textplatzhalter 2">
             <a:extLst>
               <a:ext uri="{FF2B5EF4-FFF2-40B4-BE49-F238E27FC236}">
-                <a16:creationId xmlns:a16="http://schemas.microsoft.com/office/drawing/2014/main" id="{18DD7C09-7F1A-8097-9FE1-61088FB28C5A}"/>
+                <a16:creationId xmlns:a16="http://schemas.microsoft.com/office/drawing/2014/main" id="{4084B388-AB7E-161A-424C-4C7558BA764B}"/>
               </a:ext>
             </a:extLst>
           </p:cNvPr>
@@ -437,7 +439,7 @@
           <p:cNvPr id="4" name="Datumsplatzhalter 3">
             <a:extLst>
               <a:ext uri="{FF2B5EF4-FFF2-40B4-BE49-F238E27FC236}">
-                <a16:creationId xmlns:a16="http://schemas.microsoft.com/office/drawing/2014/main" id="{E295955B-09B7-5E6A-DB47-DC6E9F95B015}"/>
+                <a16:creationId xmlns:a16="http://schemas.microsoft.com/office/drawing/2014/main" id="{BBB25775-4AEC-3612-45C8-7130E6E60A9E}"/>
               </a:ext>
             </a:extLst>
           </p:cNvPr>
@@ -453,7 +455,7 @@
           <a:bodyPr/>
           <a:lstStyle/>
           <a:p>
-            <a:fld id="{5EBFD976-FA35-42A4-AAA1-DE99CA07C9A7}" type="datetimeFigureOut">
+            <a:fld id="{A7EAB04C-8910-4AD3-B609-D6829ABEC16F}" type="datetimeFigureOut">
               <a:rPr lang="de-DE" smtClean="0"/>
               <a:t>08.10.2026</a:t>
             </a:fld>
@@ -466,7 +468,7 @@
           <p:cNvPr id="5" name="Fußzeilenplatzhalter 4">
             <a:extLst>
               <a:ext uri="{FF2B5EF4-FFF2-40B4-BE49-F238E27FC236}">
-                <a16:creationId xmlns:a16="http://schemas.microsoft.com/office/drawing/2014/main" id="{4CDC8565-95EF-CDF7-802B-CC32754FFBA0}"/>
+                <a16:creationId xmlns:a16="http://schemas.microsoft.com/office/drawing/2014/main" id="{01D7C04D-5ED6-4720-20DC-4C6C71A60AAD}"/>
               </a:ext>
             </a:extLst>
           </p:cNvPr>
@@ -491,7 +493,7 @@
           <p:cNvPr id="6" name="Foliennummernplatzhalter 5">
             <a:extLst>
               <a:ext uri="{FF2B5EF4-FFF2-40B4-BE49-F238E27FC236}">
-                <a16:creationId xmlns:a16="http://schemas.microsoft.com/office/drawing/2014/main" id="{7E570B89-D0C1-5026-E57C-2FA79DCC7559}"/>
+                <a16:creationId xmlns:a16="http://schemas.microsoft.com/office/drawing/2014/main" id="{8A22CA77-44D4-C2A9-72B9-4CDCCF9C1EAC}"/>
               </a:ext>
             </a:extLst>
           </p:cNvPr>
@@ -507,7 +509,7 @@
           <a:bodyPr/>
           <a:lstStyle/>
           <a:p>
-            <a:fld id="{9B5EE1A3-B506-4AF2-B58B-53550434FE7F}" type="slidenum">
+            <a:fld id="{8B055827-EE37-4425-A60A-F41882E0FFD2}" type="slidenum">
               <a:rPr lang="de-DE" smtClean="0"/>
               <a:t>‹Nr.›</a:t>
             </a:fld>
@@ -518,7 +520,7 @@
     </p:spTree>
     <p:extLst>
       <p:ext uri="{BB962C8B-B14F-4D97-AF65-F5344CB8AC3E}">
-        <p14:creationId xmlns:p14="http://schemas.microsoft.com/office/powerpoint/2010/main" val="2866159935"/>
+        <p14:creationId xmlns:p14="http://schemas.microsoft.com/office/powerpoint/2010/main" val="1459088958"/>
       </p:ext>
     </p:extLst>
   </p:cSld>
@@ -550,7 +552,7 @@
           <p:cNvPr id="2" name="Vertikaler Titel 1">
             <a:extLst>
               <a:ext uri="{FF2B5EF4-FFF2-40B4-BE49-F238E27FC236}">
-                <a16:creationId xmlns:a16="http://schemas.microsoft.com/office/drawing/2014/main" id="{AD885F58-6EB0-847B-0B75-899E187D21C2}"/>
+                <a16:creationId xmlns:a16="http://schemas.microsoft.com/office/drawing/2014/main" id="{96D981A3-C386-F294-DCC6-8D4899029B4C}"/>
               </a:ext>
             </a:extLst>
           </p:cNvPr>
@@ -583,7 +585,7 @@
           <p:cNvPr id="3" name="Vertikaler Textplatzhalter 2">
             <a:extLst>
               <a:ext uri="{FF2B5EF4-FFF2-40B4-BE49-F238E27FC236}">
-                <a16:creationId xmlns:a16="http://schemas.microsoft.com/office/drawing/2014/main" id="{130DA23B-91DE-E728-C388-82DD12F88E12}"/>
+                <a16:creationId xmlns:a16="http://schemas.microsoft.com/office/drawing/2014/main" id="{F2F26B6A-9F4A-1FE4-57C7-C42638E4AA6F}"/>
               </a:ext>
             </a:extLst>
           </p:cNvPr>
@@ -645,7 +647,7 @@
           <p:cNvPr id="4" name="Datumsplatzhalter 3">
             <a:extLst>
               <a:ext uri="{FF2B5EF4-FFF2-40B4-BE49-F238E27FC236}">
-                <a16:creationId xmlns:a16="http://schemas.microsoft.com/office/drawing/2014/main" id="{99CF806F-164B-4CE7-A86F-CF2D98628FD2}"/>
+                <a16:creationId xmlns:a16="http://schemas.microsoft.com/office/drawing/2014/main" id="{EFC37422-DB3F-9B78-39C2-A60EFE84715B}"/>
               </a:ext>
             </a:extLst>
           </p:cNvPr>
@@ -661,7 +663,7 @@
           <a:bodyPr/>
           <a:lstStyle/>
           <a:p>
-            <a:fld id="{5EBFD976-FA35-42A4-AAA1-DE99CA07C9A7}" type="datetimeFigureOut">
+            <a:fld id="{A7EAB04C-8910-4AD3-B609-D6829ABEC16F}" type="datetimeFigureOut">
               <a:rPr lang="de-DE" smtClean="0"/>
               <a:t>08.10.2026</a:t>
             </a:fld>
@@ -674,7 +676,7 @@
           <p:cNvPr id="5" name="Fußzeilenplatzhalter 4">
             <a:extLst>
               <a:ext uri="{FF2B5EF4-FFF2-40B4-BE49-F238E27FC236}">
-                <a16:creationId xmlns:a16="http://schemas.microsoft.com/office/drawing/2014/main" id="{8F58A433-A39C-7036-8A41-1E81B470678E}"/>
+                <a16:creationId xmlns:a16="http://schemas.microsoft.com/office/drawing/2014/main" id="{514F3A84-C297-97C0-EC1E-D1A4148FF4A5}"/>
               </a:ext>
             </a:extLst>
           </p:cNvPr>
@@ -699,7 +701,7 @@
           <p:cNvPr id="6" name="Foliennummernplatzhalter 5">
             <a:extLst>
               <a:ext uri="{FF2B5EF4-FFF2-40B4-BE49-F238E27FC236}">
-                <a16:creationId xmlns:a16="http://schemas.microsoft.com/office/drawing/2014/main" id="{A409C70D-8FA8-B2DE-A87D-8045468A4877}"/>
+                <a16:creationId xmlns:a16="http://schemas.microsoft.com/office/drawing/2014/main" id="{8CA02A38-7B28-1D7F-47F6-9897916C7289}"/>
               </a:ext>
             </a:extLst>
           </p:cNvPr>
@@ -715,7 +717,7 @@
           <a:bodyPr/>
           <a:lstStyle/>
           <a:p>
-            <a:fld id="{9B5EE1A3-B506-4AF2-B58B-53550434FE7F}" type="slidenum">
+            <a:fld id="{8B055827-EE37-4425-A60A-F41882E0FFD2}" type="slidenum">
               <a:rPr lang="de-DE" smtClean="0"/>
               <a:t>‹Nr.›</a:t>
             </a:fld>
@@ -726,7 +728,7 @@
     </p:spTree>
     <p:extLst>
       <p:ext uri="{BB962C8B-B14F-4D97-AF65-F5344CB8AC3E}">
-        <p14:creationId xmlns:p14="http://schemas.microsoft.com/office/powerpoint/2010/main" val="2142441803"/>
+        <p14:creationId xmlns:p14="http://schemas.microsoft.com/office/powerpoint/2010/main" val="3664031727"/>
       </p:ext>
     </p:extLst>
   </p:cSld>
@@ -758,7 +760,7 @@
           <p:cNvPr id="2" name="Titel 1">
             <a:extLst>
               <a:ext uri="{FF2B5EF4-FFF2-40B4-BE49-F238E27FC236}">
-                <a16:creationId xmlns:a16="http://schemas.microsoft.com/office/drawing/2014/main" id="{DB852CB3-6999-6327-093C-0A248C129F24}"/>
+                <a16:creationId xmlns:a16="http://schemas.microsoft.com/office/drawing/2014/main" id="{E041EFAD-1CE4-F504-A1D1-FD7F36A252EB}"/>
               </a:ext>
             </a:extLst>
           </p:cNvPr>
@@ -786,7 +788,7 @@
           <p:cNvPr id="3" name="Inhaltsplatzhalter 2">
             <a:extLst>
               <a:ext uri="{FF2B5EF4-FFF2-40B4-BE49-F238E27FC236}">
-                <a16:creationId xmlns:a16="http://schemas.microsoft.com/office/drawing/2014/main" id="{5906A2FB-8F31-CA9C-FFC0-AE89BEDB6F10}"/>
+                <a16:creationId xmlns:a16="http://schemas.microsoft.com/office/drawing/2014/main" id="{12D5146D-E51F-0D98-58F9-4CE578039572}"/>
               </a:ext>
             </a:extLst>
           </p:cNvPr>
@@ -843,7 +845,7 @@
           <p:cNvPr id="4" name="Datumsplatzhalter 3">
             <a:extLst>
               <a:ext uri="{FF2B5EF4-FFF2-40B4-BE49-F238E27FC236}">
-                <a16:creationId xmlns:a16="http://schemas.microsoft.com/office/drawing/2014/main" id="{12DEAB32-6779-7639-FBF5-E3D77545C00B}"/>
+                <a16:creationId xmlns:a16="http://schemas.microsoft.com/office/drawing/2014/main" id="{0C1FA08E-9CE5-303A-CF36-89119BD4D102}"/>
               </a:ext>
             </a:extLst>
           </p:cNvPr>
@@ -859,7 +861,7 @@
           <a:bodyPr/>
           <a:lstStyle/>
           <a:p>
-            <a:fld id="{5EBFD976-FA35-42A4-AAA1-DE99CA07C9A7}" type="datetimeFigureOut">
+            <a:fld id="{A7EAB04C-8910-4AD3-B609-D6829ABEC16F}" type="datetimeFigureOut">
               <a:rPr lang="de-DE" smtClean="0"/>
               <a:t>08.10.2026</a:t>
             </a:fld>
@@ -872,7 +874,7 @@
           <p:cNvPr id="5" name="Fußzeilenplatzhalter 4">
             <a:extLst>
               <a:ext uri="{FF2B5EF4-FFF2-40B4-BE49-F238E27FC236}">
-                <a16:creationId xmlns:a16="http://schemas.microsoft.com/office/drawing/2014/main" id="{4CCBDFC1-DE35-A78C-2500-C4CE4E40B45D}"/>
+                <a16:creationId xmlns:a16="http://schemas.microsoft.com/office/drawing/2014/main" id="{1E47A044-E7AC-C898-C0C0-BE01FBC68A15}"/>
               </a:ext>
             </a:extLst>
           </p:cNvPr>
@@ -897,7 +899,7 @@
           <p:cNvPr id="6" name="Foliennummernplatzhalter 5">
             <a:extLst>
               <a:ext uri="{FF2B5EF4-FFF2-40B4-BE49-F238E27FC236}">
-                <a16:creationId xmlns:a16="http://schemas.microsoft.com/office/drawing/2014/main" id="{3B254EFB-BE00-8597-B8ED-420936B80E56}"/>
+                <a16:creationId xmlns:a16="http://schemas.microsoft.com/office/drawing/2014/main" id="{C5944E25-48A3-A70E-005C-7767A01D885D}"/>
               </a:ext>
             </a:extLst>
           </p:cNvPr>
@@ -913,7 +915,7 @@
           <a:bodyPr/>
           <a:lstStyle/>
           <a:p>
-            <a:fld id="{9B5EE1A3-B506-4AF2-B58B-53550434FE7F}" type="slidenum">
+            <a:fld id="{8B055827-EE37-4425-A60A-F41882E0FFD2}" type="slidenum">
               <a:rPr lang="de-DE" smtClean="0"/>
               <a:t>‹Nr.›</a:t>
             </a:fld>
@@ -924,7 +926,7 @@
     </p:spTree>
     <p:extLst>
       <p:ext uri="{BB962C8B-B14F-4D97-AF65-F5344CB8AC3E}">
-        <p14:creationId xmlns:p14="http://schemas.microsoft.com/office/powerpoint/2010/main" val="4291966578"/>
+        <p14:creationId xmlns:p14="http://schemas.microsoft.com/office/powerpoint/2010/main" val="2848500552"/>
       </p:ext>
     </p:extLst>
   </p:cSld>
@@ -956,7 +958,7 @@
           <p:cNvPr id="2" name="Titel 1">
             <a:extLst>
               <a:ext uri="{FF2B5EF4-FFF2-40B4-BE49-F238E27FC236}">
-                <a16:creationId xmlns:a16="http://schemas.microsoft.com/office/drawing/2014/main" id="{3BB035A2-3C7E-595E-972A-B7E8C972B741}"/>
+                <a16:creationId xmlns:a16="http://schemas.microsoft.com/office/drawing/2014/main" id="{25B2F426-8A40-A73A-A5C9-8CAAF339F5E0}"/>
               </a:ext>
             </a:extLst>
           </p:cNvPr>
@@ -993,7 +995,7 @@
           <p:cNvPr id="3" name="Textplatzhalter 2">
             <a:extLst>
               <a:ext uri="{FF2B5EF4-FFF2-40B4-BE49-F238E27FC236}">
-                <a16:creationId xmlns:a16="http://schemas.microsoft.com/office/drawing/2014/main" id="{F3728911-3F78-E003-1CE9-57036C33C185}"/>
+                <a16:creationId xmlns:a16="http://schemas.microsoft.com/office/drawing/2014/main" id="{FD2F5CCF-41C6-43F2-C86F-F5F414793174}"/>
               </a:ext>
             </a:extLst>
           </p:cNvPr>
@@ -1118,7 +1120,7 @@
           <p:cNvPr id="4" name="Datumsplatzhalter 3">
             <a:extLst>
               <a:ext uri="{FF2B5EF4-FFF2-40B4-BE49-F238E27FC236}">
-                <a16:creationId xmlns:a16="http://schemas.microsoft.com/office/drawing/2014/main" id="{9810F2D4-FCFD-8027-9761-72DA4B3323D9}"/>
+                <a16:creationId xmlns:a16="http://schemas.microsoft.com/office/drawing/2014/main" id="{E3FE8952-99D6-9A4E-5AC5-2B79029747FC}"/>
               </a:ext>
             </a:extLst>
           </p:cNvPr>
@@ -1134,7 +1136,7 @@
           <a:bodyPr/>
           <a:lstStyle/>
           <a:p>
-            <a:fld id="{5EBFD976-FA35-42A4-AAA1-DE99CA07C9A7}" type="datetimeFigureOut">
+            <a:fld id="{A7EAB04C-8910-4AD3-B609-D6829ABEC16F}" type="datetimeFigureOut">
               <a:rPr lang="de-DE" smtClean="0"/>
               <a:t>08.10.2026</a:t>
             </a:fld>
@@ -1147,7 +1149,7 @@
           <p:cNvPr id="5" name="Fußzeilenplatzhalter 4">
             <a:extLst>
               <a:ext uri="{FF2B5EF4-FFF2-40B4-BE49-F238E27FC236}">
-                <a16:creationId xmlns:a16="http://schemas.microsoft.com/office/drawing/2014/main" id="{7A503C69-915D-0562-9D3E-28216F89918A}"/>
+                <a16:creationId xmlns:a16="http://schemas.microsoft.com/office/drawing/2014/main" id="{2C896470-B5C1-8F8A-BABA-4A79F298A4CC}"/>
               </a:ext>
             </a:extLst>
           </p:cNvPr>
@@ -1172,7 +1174,7 @@
           <p:cNvPr id="6" name="Foliennummernplatzhalter 5">
             <a:extLst>
               <a:ext uri="{FF2B5EF4-FFF2-40B4-BE49-F238E27FC236}">
-                <a16:creationId xmlns:a16="http://schemas.microsoft.com/office/drawing/2014/main" id="{AA1FF8CA-F1D1-9D7F-EC79-B2D60C44B0D3}"/>
+                <a16:creationId xmlns:a16="http://schemas.microsoft.com/office/drawing/2014/main" id="{DB1F3564-7966-8E56-485D-AB94E2237758}"/>
               </a:ext>
             </a:extLst>
           </p:cNvPr>
@@ -1188,7 +1190,7 @@
           <a:bodyPr/>
           <a:lstStyle/>
           <a:p>
-            <a:fld id="{9B5EE1A3-B506-4AF2-B58B-53550434FE7F}" type="slidenum">
+            <a:fld id="{8B055827-EE37-4425-A60A-F41882E0FFD2}" type="slidenum">
               <a:rPr lang="de-DE" smtClean="0"/>
               <a:t>‹Nr.›</a:t>
             </a:fld>
@@ -1199,7 +1201,7 @@
     </p:spTree>
     <p:extLst>
       <p:ext uri="{BB962C8B-B14F-4D97-AF65-F5344CB8AC3E}">
-        <p14:creationId xmlns:p14="http://schemas.microsoft.com/office/powerpoint/2010/main" val="2863727426"/>
+        <p14:creationId xmlns:p14="http://schemas.microsoft.com/office/powerpoint/2010/main" val="175642502"/>
       </p:ext>
     </p:extLst>
   </p:cSld>
@@ -1231,7 +1233,7 @@
           <p:cNvPr id="2" name="Titel 1">
             <a:extLst>
               <a:ext uri="{FF2B5EF4-FFF2-40B4-BE49-F238E27FC236}">
-                <a16:creationId xmlns:a16="http://schemas.microsoft.com/office/drawing/2014/main" id="{DE54755B-390F-B3D2-596D-23D8F4933585}"/>
+                <a16:creationId xmlns:a16="http://schemas.microsoft.com/office/drawing/2014/main" id="{00EB414B-ADDB-07E2-31D8-8C05CEC06ACB}"/>
               </a:ext>
             </a:extLst>
           </p:cNvPr>
@@ -1259,7 +1261,7 @@
           <p:cNvPr id="3" name="Inhaltsplatzhalter 2">
             <a:extLst>
               <a:ext uri="{FF2B5EF4-FFF2-40B4-BE49-F238E27FC236}">
-                <a16:creationId xmlns:a16="http://schemas.microsoft.com/office/drawing/2014/main" id="{71F171BB-29DD-94B7-6A39-D94E22C8760A}"/>
+                <a16:creationId xmlns:a16="http://schemas.microsoft.com/office/drawing/2014/main" id="{2D334A9E-975D-AAF4-6D87-2817131D7ACF}"/>
               </a:ext>
             </a:extLst>
           </p:cNvPr>
@@ -1321,7 +1323,7 @@
           <p:cNvPr id="4" name="Inhaltsplatzhalter 3">
             <a:extLst>
               <a:ext uri="{FF2B5EF4-FFF2-40B4-BE49-F238E27FC236}">
-                <a16:creationId xmlns:a16="http://schemas.microsoft.com/office/drawing/2014/main" id="{C26E8427-4F5F-AD19-4939-6AD6950BF284}"/>
+                <a16:creationId xmlns:a16="http://schemas.microsoft.com/office/drawing/2014/main" id="{1722891E-CD05-AF90-60EC-906DDFD0C11C}"/>
               </a:ext>
             </a:extLst>
           </p:cNvPr>
@@ -1383,7 +1385,7 @@
           <p:cNvPr id="5" name="Datumsplatzhalter 4">
             <a:extLst>
               <a:ext uri="{FF2B5EF4-FFF2-40B4-BE49-F238E27FC236}">
-                <a16:creationId xmlns:a16="http://schemas.microsoft.com/office/drawing/2014/main" id="{0457B603-60E8-0458-5F42-171725BD7104}"/>
+                <a16:creationId xmlns:a16="http://schemas.microsoft.com/office/drawing/2014/main" id="{789A06D0-4F55-B7D7-955A-FCFBB566D553}"/>
               </a:ext>
             </a:extLst>
           </p:cNvPr>
@@ -1399,7 +1401,7 @@
           <a:bodyPr/>
           <a:lstStyle/>
           <a:p>
-            <a:fld id="{5EBFD976-FA35-42A4-AAA1-DE99CA07C9A7}" type="datetimeFigureOut">
+            <a:fld id="{A7EAB04C-8910-4AD3-B609-D6829ABEC16F}" type="datetimeFigureOut">
               <a:rPr lang="de-DE" smtClean="0"/>
               <a:t>08.10.2026</a:t>
             </a:fld>
@@ -1412,7 +1414,7 @@
           <p:cNvPr id="6" name="Fußzeilenplatzhalter 5">
             <a:extLst>
               <a:ext uri="{FF2B5EF4-FFF2-40B4-BE49-F238E27FC236}">
-                <a16:creationId xmlns:a16="http://schemas.microsoft.com/office/drawing/2014/main" id="{623A4669-C524-AF73-EB72-C1992DA9748D}"/>
+                <a16:creationId xmlns:a16="http://schemas.microsoft.com/office/drawing/2014/main" id="{B241AB92-7052-232F-B588-900E2824FEA4}"/>
               </a:ext>
             </a:extLst>
           </p:cNvPr>
@@ -1437,7 +1439,7 @@
           <p:cNvPr id="7" name="Foliennummernplatzhalter 6">
             <a:extLst>
               <a:ext uri="{FF2B5EF4-FFF2-40B4-BE49-F238E27FC236}">
-                <a16:creationId xmlns:a16="http://schemas.microsoft.com/office/drawing/2014/main" id="{0B8D3BD2-2DFF-BA51-07DA-07F2F8CF356B}"/>
+                <a16:creationId xmlns:a16="http://schemas.microsoft.com/office/drawing/2014/main" id="{6F9DFDAD-E97F-6A8D-E6CE-3AC31D72D734}"/>
               </a:ext>
             </a:extLst>
           </p:cNvPr>
@@ -1453,7 +1455,7 @@
           <a:bodyPr/>
           <a:lstStyle/>
           <a:p>
-            <a:fld id="{9B5EE1A3-B506-4AF2-B58B-53550434FE7F}" type="slidenum">
+            <a:fld id="{8B055827-EE37-4425-A60A-F41882E0FFD2}" type="slidenum">
               <a:rPr lang="de-DE" smtClean="0"/>
               <a:t>‹Nr.›</a:t>
             </a:fld>
@@ -1464,7 +1466,7 @@
     </p:spTree>
     <p:extLst>
       <p:ext uri="{BB962C8B-B14F-4D97-AF65-F5344CB8AC3E}">
-        <p14:creationId xmlns:p14="http://schemas.microsoft.com/office/powerpoint/2010/main" val="1963180424"/>
+        <p14:creationId xmlns:p14="http://schemas.microsoft.com/office/powerpoint/2010/main" val="2060770139"/>
       </p:ext>
     </p:extLst>
   </p:cSld>
@@ -1496,7 +1498,7 @@
           <p:cNvPr id="2" name="Titel 1">
             <a:extLst>
               <a:ext uri="{FF2B5EF4-FFF2-40B4-BE49-F238E27FC236}">
-                <a16:creationId xmlns:a16="http://schemas.microsoft.com/office/drawing/2014/main" id="{E649A6B4-18D9-EE61-3A9D-0D818E4A8D16}"/>
+                <a16:creationId xmlns:a16="http://schemas.microsoft.com/office/drawing/2014/main" id="{B99E7F31-67E6-8961-32DB-91BA3DBCFAAD}"/>
               </a:ext>
             </a:extLst>
           </p:cNvPr>
@@ -1529,7 +1531,7 @@
           <p:cNvPr id="3" name="Textplatzhalter 2">
             <a:extLst>
               <a:ext uri="{FF2B5EF4-FFF2-40B4-BE49-F238E27FC236}">
-                <a16:creationId xmlns:a16="http://schemas.microsoft.com/office/drawing/2014/main" id="{6775E948-89B9-8C23-1203-A68EBEB0FC3C}"/>
+                <a16:creationId xmlns:a16="http://schemas.microsoft.com/office/drawing/2014/main" id="{66251215-6526-1152-00D0-34E2D24C6D08}"/>
               </a:ext>
             </a:extLst>
           </p:cNvPr>
@@ -1600,7 +1602,7 @@
           <p:cNvPr id="4" name="Inhaltsplatzhalter 3">
             <a:extLst>
               <a:ext uri="{FF2B5EF4-FFF2-40B4-BE49-F238E27FC236}">
-                <a16:creationId xmlns:a16="http://schemas.microsoft.com/office/drawing/2014/main" id="{3341EF7F-0DC3-9D0D-8A43-E1504CEE81B9}"/>
+                <a16:creationId xmlns:a16="http://schemas.microsoft.com/office/drawing/2014/main" id="{D6E33BE4-7461-6A40-6674-CCA4908BB42F}"/>
               </a:ext>
             </a:extLst>
           </p:cNvPr>
@@ -1662,7 +1664,7 @@
           <p:cNvPr id="5" name="Textplatzhalter 4">
             <a:extLst>
               <a:ext uri="{FF2B5EF4-FFF2-40B4-BE49-F238E27FC236}">
-                <a16:creationId xmlns:a16="http://schemas.microsoft.com/office/drawing/2014/main" id="{089B038E-C4D1-0A99-56DC-A9FADA99CBA1}"/>
+                <a16:creationId xmlns:a16="http://schemas.microsoft.com/office/drawing/2014/main" id="{F38B87CA-B268-0A5D-869B-412A16C5D160}"/>
               </a:ext>
             </a:extLst>
           </p:cNvPr>
@@ -1733,7 +1735,7 @@
           <p:cNvPr id="6" name="Inhaltsplatzhalter 5">
             <a:extLst>
               <a:ext uri="{FF2B5EF4-FFF2-40B4-BE49-F238E27FC236}">
-                <a16:creationId xmlns:a16="http://schemas.microsoft.com/office/drawing/2014/main" id="{78AD8C9D-0452-FC4E-ABB1-860620399602}"/>
+                <a16:creationId xmlns:a16="http://schemas.microsoft.com/office/drawing/2014/main" id="{D8C612A6-1FBD-BC3D-7B09-2F7F73611E88}"/>
               </a:ext>
             </a:extLst>
           </p:cNvPr>
@@ -1795,7 +1797,7 @@
           <p:cNvPr id="7" name="Datumsplatzhalter 6">
             <a:extLst>
               <a:ext uri="{FF2B5EF4-FFF2-40B4-BE49-F238E27FC236}">
-                <a16:creationId xmlns:a16="http://schemas.microsoft.com/office/drawing/2014/main" id="{FDE59C10-EC3E-DDDE-36D3-E8577636F09A}"/>
+                <a16:creationId xmlns:a16="http://schemas.microsoft.com/office/drawing/2014/main" id="{F83B0B9E-B777-48D6-B269-B03DD0091427}"/>
               </a:ext>
             </a:extLst>
           </p:cNvPr>
@@ -1811,7 +1813,7 @@
           <a:bodyPr/>
           <a:lstStyle/>
           <a:p>
-            <a:fld id="{5EBFD976-FA35-42A4-AAA1-DE99CA07C9A7}" type="datetimeFigureOut">
+            <a:fld id="{A7EAB04C-8910-4AD3-B609-D6829ABEC16F}" type="datetimeFigureOut">
               <a:rPr lang="de-DE" smtClean="0"/>
               <a:t>08.10.2026</a:t>
             </a:fld>
@@ -1824,7 +1826,7 @@
           <p:cNvPr id="8" name="Fußzeilenplatzhalter 7">
             <a:extLst>
               <a:ext uri="{FF2B5EF4-FFF2-40B4-BE49-F238E27FC236}">
-                <a16:creationId xmlns:a16="http://schemas.microsoft.com/office/drawing/2014/main" id="{4FE8478D-6F01-B713-8830-64AFE8928438}"/>
+                <a16:creationId xmlns:a16="http://schemas.microsoft.com/office/drawing/2014/main" id="{E0E478CB-EBAF-6499-817D-7AC1390201C5}"/>
               </a:ext>
             </a:extLst>
           </p:cNvPr>
@@ -1849,7 +1851,7 @@
           <p:cNvPr id="9" name="Foliennummernplatzhalter 8">
             <a:extLst>
               <a:ext uri="{FF2B5EF4-FFF2-40B4-BE49-F238E27FC236}">
-                <a16:creationId xmlns:a16="http://schemas.microsoft.com/office/drawing/2014/main" id="{09EA4C3F-9D04-749D-2750-C0F630C65A90}"/>
+                <a16:creationId xmlns:a16="http://schemas.microsoft.com/office/drawing/2014/main" id="{2D52B08C-0A9B-825A-B119-DF02B9CFE4CD}"/>
               </a:ext>
             </a:extLst>
           </p:cNvPr>
@@ -1865,7 +1867,7 @@
           <a:bodyPr/>
           <a:lstStyle/>
           <a:p>
-            <a:fld id="{9B5EE1A3-B506-4AF2-B58B-53550434FE7F}" type="slidenum">
+            <a:fld id="{8B055827-EE37-4425-A60A-F41882E0FFD2}" type="slidenum">
               <a:rPr lang="de-DE" smtClean="0"/>
               <a:t>‹Nr.›</a:t>
             </a:fld>
@@ -1876,7 +1878,7 @@
     </p:spTree>
     <p:extLst>
       <p:ext uri="{BB962C8B-B14F-4D97-AF65-F5344CB8AC3E}">
-        <p14:creationId xmlns:p14="http://schemas.microsoft.com/office/powerpoint/2010/main" val="111507289"/>
+        <p14:creationId xmlns:p14="http://schemas.microsoft.com/office/powerpoint/2010/main" val="4235222909"/>
       </p:ext>
     </p:extLst>
   </p:cSld>
@@ -1908,7 +1910,7 @@
           <p:cNvPr id="2" name="Titel 1">
             <a:extLst>
               <a:ext uri="{FF2B5EF4-FFF2-40B4-BE49-F238E27FC236}">
-                <a16:creationId xmlns:a16="http://schemas.microsoft.com/office/drawing/2014/main" id="{751D06A5-12EC-5022-1EDB-117B651A2AAF}"/>
+                <a16:creationId xmlns:a16="http://schemas.microsoft.com/office/drawing/2014/main" id="{6D6E67A3-FD21-E0A5-8EAA-B66AF28FF2A3}"/>
               </a:ext>
             </a:extLst>
           </p:cNvPr>
@@ -1936,7 +1938,7 @@
           <p:cNvPr id="3" name="Datumsplatzhalter 2">
             <a:extLst>
               <a:ext uri="{FF2B5EF4-FFF2-40B4-BE49-F238E27FC236}">
-                <a16:creationId xmlns:a16="http://schemas.microsoft.com/office/drawing/2014/main" id="{C61A1590-0205-BBCF-4A71-A93BD6F861AA}"/>
+                <a16:creationId xmlns:a16="http://schemas.microsoft.com/office/drawing/2014/main" id="{8DD3AD4B-266F-97D8-E7B2-E8FF8374BE8A}"/>
               </a:ext>
             </a:extLst>
           </p:cNvPr>
@@ -1952,7 +1954,7 @@
           <a:bodyPr/>
           <a:lstStyle/>
           <a:p>
-            <a:fld id="{5EBFD976-FA35-42A4-AAA1-DE99CA07C9A7}" type="datetimeFigureOut">
+            <a:fld id="{A7EAB04C-8910-4AD3-B609-D6829ABEC16F}" type="datetimeFigureOut">
               <a:rPr lang="de-DE" smtClean="0"/>
               <a:t>08.10.2026</a:t>
             </a:fld>
@@ -1965,7 +1967,7 @@
           <p:cNvPr id="4" name="Fußzeilenplatzhalter 3">
             <a:extLst>
               <a:ext uri="{FF2B5EF4-FFF2-40B4-BE49-F238E27FC236}">
-                <a16:creationId xmlns:a16="http://schemas.microsoft.com/office/drawing/2014/main" id="{0F98CBE2-5C37-4F03-91D5-7E8D248A2A98}"/>
+                <a16:creationId xmlns:a16="http://schemas.microsoft.com/office/drawing/2014/main" id="{61568192-6175-9D1B-B4F8-B522DB7759BD}"/>
               </a:ext>
             </a:extLst>
           </p:cNvPr>
@@ -1990,7 +1992,7 @@
           <p:cNvPr id="5" name="Foliennummernplatzhalter 4">
             <a:extLst>
               <a:ext uri="{FF2B5EF4-FFF2-40B4-BE49-F238E27FC236}">
-                <a16:creationId xmlns:a16="http://schemas.microsoft.com/office/drawing/2014/main" id="{DC34C712-A3C0-3407-A5A5-3DF9A0925AA6}"/>
+                <a16:creationId xmlns:a16="http://schemas.microsoft.com/office/drawing/2014/main" id="{7DFE6E33-A3ED-9195-A6E8-8B641AD8E89D}"/>
               </a:ext>
             </a:extLst>
           </p:cNvPr>
@@ -2006,7 +2008,7 @@
           <a:bodyPr/>
           <a:lstStyle/>
           <a:p>
-            <a:fld id="{9B5EE1A3-B506-4AF2-B58B-53550434FE7F}" type="slidenum">
+            <a:fld id="{8B055827-EE37-4425-A60A-F41882E0FFD2}" type="slidenum">
               <a:rPr lang="de-DE" smtClean="0"/>
               <a:t>‹Nr.›</a:t>
             </a:fld>
@@ -2017,7 +2019,7 @@
     </p:spTree>
     <p:extLst>
       <p:ext uri="{BB962C8B-B14F-4D97-AF65-F5344CB8AC3E}">
-        <p14:creationId xmlns:p14="http://schemas.microsoft.com/office/powerpoint/2010/main" val="1492549084"/>
+        <p14:creationId xmlns:p14="http://schemas.microsoft.com/office/powerpoint/2010/main" val="91855070"/>
       </p:ext>
     </p:extLst>
   </p:cSld>
@@ -2049,7 +2051,7 @@
           <p:cNvPr id="2" name="Datumsplatzhalter 1">
             <a:extLst>
               <a:ext uri="{FF2B5EF4-FFF2-40B4-BE49-F238E27FC236}">
-                <a16:creationId xmlns:a16="http://schemas.microsoft.com/office/drawing/2014/main" id="{9F0C2BCF-3DEE-ABC1-9D02-BAC8AF55CAEA}"/>
+                <a16:creationId xmlns:a16="http://schemas.microsoft.com/office/drawing/2014/main" id="{D75A3C3E-831A-CD92-2F20-791DFD5C7BE0}"/>
               </a:ext>
             </a:extLst>
           </p:cNvPr>
@@ -2065,7 +2067,7 @@
           <a:bodyPr/>
           <a:lstStyle/>
           <a:p>
-            <a:fld id="{5EBFD976-FA35-42A4-AAA1-DE99CA07C9A7}" type="datetimeFigureOut">
+            <a:fld id="{A7EAB04C-8910-4AD3-B609-D6829ABEC16F}" type="datetimeFigureOut">
               <a:rPr lang="de-DE" smtClean="0"/>
               <a:t>08.10.2026</a:t>
             </a:fld>
@@ -2078,7 +2080,7 @@
           <p:cNvPr id="3" name="Fußzeilenplatzhalter 2">
             <a:extLst>
               <a:ext uri="{FF2B5EF4-FFF2-40B4-BE49-F238E27FC236}">
-                <a16:creationId xmlns:a16="http://schemas.microsoft.com/office/drawing/2014/main" id="{C2BCF89F-1C70-25C9-20AB-CB42ACA24CB8}"/>
+                <a16:creationId xmlns:a16="http://schemas.microsoft.com/office/drawing/2014/main" id="{E15676A7-E59A-0929-48CD-83566D987A0C}"/>
               </a:ext>
             </a:extLst>
           </p:cNvPr>
@@ -2103,7 +2105,7 @@
           <p:cNvPr id="4" name="Foliennummernplatzhalter 3">
             <a:extLst>
               <a:ext uri="{FF2B5EF4-FFF2-40B4-BE49-F238E27FC236}">
-                <a16:creationId xmlns:a16="http://schemas.microsoft.com/office/drawing/2014/main" id="{BBB053BF-F529-28CD-3C2B-3783424DA4EF}"/>
+                <a16:creationId xmlns:a16="http://schemas.microsoft.com/office/drawing/2014/main" id="{4054E0BF-9DAB-8CF7-B7D3-E67F803D2B6A}"/>
               </a:ext>
             </a:extLst>
           </p:cNvPr>
@@ -2119,7 +2121,7 @@
           <a:bodyPr/>
           <a:lstStyle/>
           <a:p>
-            <a:fld id="{9B5EE1A3-B506-4AF2-B58B-53550434FE7F}" type="slidenum">
+            <a:fld id="{8B055827-EE37-4425-A60A-F41882E0FFD2}" type="slidenum">
               <a:rPr lang="de-DE" smtClean="0"/>
               <a:t>‹Nr.›</a:t>
             </a:fld>
@@ -2130,7 +2132,7 @@
     </p:spTree>
     <p:extLst>
       <p:ext uri="{BB962C8B-B14F-4D97-AF65-F5344CB8AC3E}">
-        <p14:creationId xmlns:p14="http://schemas.microsoft.com/office/powerpoint/2010/main" val="3952914578"/>
+        <p14:creationId xmlns:p14="http://schemas.microsoft.com/office/powerpoint/2010/main" val="2498670751"/>
       </p:ext>
     </p:extLst>
   </p:cSld>
@@ -2162,7 +2164,7 @@
           <p:cNvPr id="2" name="Titel 1">
             <a:extLst>
               <a:ext uri="{FF2B5EF4-FFF2-40B4-BE49-F238E27FC236}">
-                <a16:creationId xmlns:a16="http://schemas.microsoft.com/office/drawing/2014/main" id="{4E1AEDBE-C685-A6F9-44D2-340014ADB6D8}"/>
+                <a16:creationId xmlns:a16="http://schemas.microsoft.com/office/drawing/2014/main" id="{206651F4-2754-CB5C-50CB-F198809DE5C4}"/>
               </a:ext>
             </a:extLst>
           </p:cNvPr>
@@ -2199,7 +2201,7 @@
           <p:cNvPr id="3" name="Inhaltsplatzhalter 2">
             <a:extLst>
               <a:ext uri="{FF2B5EF4-FFF2-40B4-BE49-F238E27FC236}">
-                <a16:creationId xmlns:a16="http://schemas.microsoft.com/office/drawing/2014/main" id="{4F2C9E56-A3A3-25D7-A797-C12B0C7422A0}"/>
+                <a16:creationId xmlns:a16="http://schemas.microsoft.com/office/drawing/2014/main" id="{BCFDEA16-AE23-12C3-C5BE-1A3D204445C7}"/>
               </a:ext>
             </a:extLst>
           </p:cNvPr>
@@ -2289,7 +2291,7 @@
           <p:cNvPr id="4" name="Textplatzhalter 3">
             <a:extLst>
               <a:ext uri="{FF2B5EF4-FFF2-40B4-BE49-F238E27FC236}">
-                <a16:creationId xmlns:a16="http://schemas.microsoft.com/office/drawing/2014/main" id="{4BEF9E12-BD12-7C6E-D956-AA3A2A1A72E3}"/>
+                <a16:creationId xmlns:a16="http://schemas.microsoft.com/office/drawing/2014/main" id="{1162120C-C3CD-FE5D-74AA-1FAC4FF7C094}"/>
               </a:ext>
             </a:extLst>
           </p:cNvPr>
@@ -2360,7 +2362,7 @@
           <p:cNvPr id="5" name="Datumsplatzhalter 4">
             <a:extLst>
               <a:ext uri="{FF2B5EF4-FFF2-40B4-BE49-F238E27FC236}">
-                <a16:creationId xmlns:a16="http://schemas.microsoft.com/office/drawing/2014/main" id="{C340C9F5-F155-C632-A5E6-8FA33EEABB0C}"/>
+                <a16:creationId xmlns:a16="http://schemas.microsoft.com/office/drawing/2014/main" id="{C05C85D5-B58A-AF50-364D-EE484BFF6379}"/>
               </a:ext>
             </a:extLst>
           </p:cNvPr>
@@ -2376,7 +2378,7 @@
           <a:bodyPr/>
           <a:lstStyle/>
           <a:p>
-            <a:fld id="{5EBFD976-FA35-42A4-AAA1-DE99CA07C9A7}" type="datetimeFigureOut">
+            <a:fld id="{A7EAB04C-8910-4AD3-B609-D6829ABEC16F}" type="datetimeFigureOut">
               <a:rPr lang="de-DE" smtClean="0"/>
               <a:t>08.10.2026</a:t>
             </a:fld>
@@ -2389,7 +2391,7 @@
           <p:cNvPr id="6" name="Fußzeilenplatzhalter 5">
             <a:extLst>
               <a:ext uri="{FF2B5EF4-FFF2-40B4-BE49-F238E27FC236}">
-                <a16:creationId xmlns:a16="http://schemas.microsoft.com/office/drawing/2014/main" id="{703BB906-F816-B223-9459-6A181C522CEF}"/>
+                <a16:creationId xmlns:a16="http://schemas.microsoft.com/office/drawing/2014/main" id="{E6246856-4046-D475-1996-DBF6766A408C}"/>
               </a:ext>
             </a:extLst>
           </p:cNvPr>
@@ -2414,7 +2416,7 @@
           <p:cNvPr id="7" name="Foliennummernplatzhalter 6">
             <a:extLst>
               <a:ext uri="{FF2B5EF4-FFF2-40B4-BE49-F238E27FC236}">
-                <a16:creationId xmlns:a16="http://schemas.microsoft.com/office/drawing/2014/main" id="{F9F8DEB4-97F4-428D-67CC-17A50219B699}"/>
+                <a16:creationId xmlns:a16="http://schemas.microsoft.com/office/drawing/2014/main" id="{C2C6F68F-C560-0156-7EBF-A90FD1D8B95C}"/>
               </a:ext>
             </a:extLst>
           </p:cNvPr>
@@ -2430,7 +2432,7 @@
           <a:bodyPr/>
           <a:lstStyle/>
           <a:p>
-            <a:fld id="{9B5EE1A3-B506-4AF2-B58B-53550434FE7F}" type="slidenum">
+            <a:fld id="{8B055827-EE37-4425-A60A-F41882E0FFD2}" type="slidenum">
               <a:rPr lang="de-DE" smtClean="0"/>
               <a:t>‹Nr.›</a:t>
             </a:fld>
@@ -2441,7 +2443,7 @@
     </p:spTree>
     <p:extLst>
       <p:ext uri="{BB962C8B-B14F-4D97-AF65-F5344CB8AC3E}">
-        <p14:creationId xmlns:p14="http://schemas.microsoft.com/office/powerpoint/2010/main" val="3189133135"/>
+        <p14:creationId xmlns:p14="http://schemas.microsoft.com/office/powerpoint/2010/main" val="3770993461"/>
       </p:ext>
     </p:extLst>
   </p:cSld>
@@ -2473,7 +2475,7 @@
           <p:cNvPr id="2" name="Titel 1">
             <a:extLst>
               <a:ext uri="{FF2B5EF4-FFF2-40B4-BE49-F238E27FC236}">
-                <a16:creationId xmlns:a16="http://schemas.microsoft.com/office/drawing/2014/main" id="{433D12A6-A5D4-542A-4D83-547591B3184D}"/>
+                <a16:creationId xmlns:a16="http://schemas.microsoft.com/office/drawing/2014/main" id="{93B47601-028F-654A-3BA7-53B6EF9B2801}"/>
               </a:ext>
             </a:extLst>
           </p:cNvPr>
@@ -2510,7 +2512,7 @@
           <p:cNvPr id="3" name="Bildplatzhalter 2">
             <a:extLst>
               <a:ext uri="{FF2B5EF4-FFF2-40B4-BE49-F238E27FC236}">
-                <a16:creationId xmlns:a16="http://schemas.microsoft.com/office/drawing/2014/main" id="{8889692B-E6F1-0D36-BB05-2A30530DEF62}"/>
+                <a16:creationId xmlns:a16="http://schemas.microsoft.com/office/drawing/2014/main" id="{5E9E254A-E658-0C42-F010-DC3A3CAE96D9}"/>
               </a:ext>
             </a:extLst>
           </p:cNvPr>
@@ -2577,7 +2579,7 @@
           <p:cNvPr id="4" name="Textplatzhalter 3">
             <a:extLst>
               <a:ext uri="{FF2B5EF4-FFF2-40B4-BE49-F238E27FC236}">
-                <a16:creationId xmlns:a16="http://schemas.microsoft.com/office/drawing/2014/main" id="{CBDC0E69-C666-157C-BB80-7337B1E34314}"/>
+                <a16:creationId xmlns:a16="http://schemas.microsoft.com/office/drawing/2014/main" id="{11A7C49D-EA10-9E31-8735-5E2B03EFEC35}"/>
               </a:ext>
             </a:extLst>
           </p:cNvPr>
@@ -2648,7 +2650,7 @@
           <p:cNvPr id="5" name="Datumsplatzhalter 4">
             <a:extLst>
               <a:ext uri="{FF2B5EF4-FFF2-40B4-BE49-F238E27FC236}">
-                <a16:creationId xmlns:a16="http://schemas.microsoft.com/office/drawing/2014/main" id="{EB4837CC-0C08-71A1-CFA5-FE85D471D593}"/>
+                <a16:creationId xmlns:a16="http://schemas.microsoft.com/office/drawing/2014/main" id="{E84EEF85-B79C-B8CC-EBA8-8325A8353E10}"/>
               </a:ext>
             </a:extLst>
           </p:cNvPr>
@@ -2664,7 +2666,7 @@
           <a:bodyPr/>
           <a:lstStyle/>
           <a:p>
-            <a:fld id="{5EBFD976-FA35-42A4-AAA1-DE99CA07C9A7}" type="datetimeFigureOut">
+            <a:fld id="{A7EAB04C-8910-4AD3-B609-D6829ABEC16F}" type="datetimeFigureOut">
               <a:rPr lang="de-DE" smtClean="0"/>
               <a:t>08.10.2026</a:t>
             </a:fld>
@@ -2677,7 +2679,7 @@
           <p:cNvPr id="6" name="Fußzeilenplatzhalter 5">
             <a:extLst>
               <a:ext uri="{FF2B5EF4-FFF2-40B4-BE49-F238E27FC236}">
-                <a16:creationId xmlns:a16="http://schemas.microsoft.com/office/drawing/2014/main" id="{DB79EB82-7BA4-332E-F464-39B929750F29}"/>
+                <a16:creationId xmlns:a16="http://schemas.microsoft.com/office/drawing/2014/main" id="{84926296-8351-5485-4300-03338EEC4E7E}"/>
               </a:ext>
             </a:extLst>
           </p:cNvPr>
@@ -2702,7 +2704,7 @@
           <p:cNvPr id="7" name="Foliennummernplatzhalter 6">
             <a:extLst>
               <a:ext uri="{FF2B5EF4-FFF2-40B4-BE49-F238E27FC236}">
-                <a16:creationId xmlns:a16="http://schemas.microsoft.com/office/drawing/2014/main" id="{5FE8D85F-5315-3BA7-7677-C26434A9651A}"/>
+                <a16:creationId xmlns:a16="http://schemas.microsoft.com/office/drawing/2014/main" id="{494E0E06-B17C-7A10-09DC-7EBF93EECBEA}"/>
               </a:ext>
             </a:extLst>
           </p:cNvPr>
@@ -2718,7 +2720,7 @@
           <a:bodyPr/>
           <a:lstStyle/>
           <a:p>
-            <a:fld id="{9B5EE1A3-B506-4AF2-B58B-53550434FE7F}" type="slidenum">
+            <a:fld id="{8B055827-EE37-4425-A60A-F41882E0FFD2}" type="slidenum">
               <a:rPr lang="de-DE" smtClean="0"/>
               <a:t>‹Nr.›</a:t>
             </a:fld>
@@ -2729,7 +2731,7 @@
     </p:spTree>
     <p:extLst>
       <p:ext uri="{BB962C8B-B14F-4D97-AF65-F5344CB8AC3E}">
-        <p14:creationId xmlns:p14="http://schemas.microsoft.com/office/powerpoint/2010/main" val="3380037328"/>
+        <p14:creationId xmlns:p14="http://schemas.microsoft.com/office/powerpoint/2010/main" val="602827579"/>
       </p:ext>
     </p:extLst>
   </p:cSld>
@@ -2766,7 +2768,7 @@
           <p:cNvPr id="2" name="Titelplatzhalter 1">
             <a:extLst>
               <a:ext uri="{FF2B5EF4-FFF2-40B4-BE49-F238E27FC236}">
-                <a16:creationId xmlns:a16="http://schemas.microsoft.com/office/drawing/2014/main" id="{A0A3F09F-8451-34DE-BCEE-47BE019CA76D}"/>
+                <a16:creationId xmlns:a16="http://schemas.microsoft.com/office/drawing/2014/main" id="{FC02FBF0-15BE-5798-48F1-792C8B6E0524}"/>
               </a:ext>
             </a:extLst>
           </p:cNvPr>
@@ -2804,7 +2806,7 @@
           <p:cNvPr id="3" name="Textplatzhalter 2">
             <a:extLst>
               <a:ext uri="{FF2B5EF4-FFF2-40B4-BE49-F238E27FC236}">
-                <a16:creationId xmlns:a16="http://schemas.microsoft.com/office/drawing/2014/main" id="{02847D23-E509-52FD-A26D-B7C4F3E8E0E9}"/>
+                <a16:creationId xmlns:a16="http://schemas.microsoft.com/office/drawing/2014/main" id="{5FAA8149-6F27-76EC-D379-C2CD6E21E311}"/>
               </a:ext>
             </a:extLst>
           </p:cNvPr>
@@ -2871,7 +2873,7 @@
           <p:cNvPr id="4" name="Datumsplatzhalter 3">
             <a:extLst>
               <a:ext uri="{FF2B5EF4-FFF2-40B4-BE49-F238E27FC236}">
-                <a16:creationId xmlns:a16="http://schemas.microsoft.com/office/drawing/2014/main" id="{587EDC3C-1B6D-09DA-3F81-5BF65F450893}"/>
+                <a16:creationId xmlns:a16="http://schemas.microsoft.com/office/drawing/2014/main" id="{943E66F1-33F5-94A8-CE95-1042B7BFF2FE}"/>
               </a:ext>
             </a:extLst>
           </p:cNvPr>
@@ -2905,7 +2907,7 @@
             </a:lvl1pPr>
           </a:lstStyle>
           <a:p>
-            <a:fld id="{5EBFD976-FA35-42A4-AAA1-DE99CA07C9A7}" type="datetimeFigureOut">
+            <a:fld id="{A7EAB04C-8910-4AD3-B609-D6829ABEC16F}" type="datetimeFigureOut">
               <a:rPr lang="de-DE" smtClean="0"/>
               <a:t>08.10.2026</a:t>
             </a:fld>
@@ -2918,7 +2920,7 @@
           <p:cNvPr id="5" name="Fußzeilenplatzhalter 4">
             <a:extLst>
               <a:ext uri="{FF2B5EF4-FFF2-40B4-BE49-F238E27FC236}">
-                <a16:creationId xmlns:a16="http://schemas.microsoft.com/office/drawing/2014/main" id="{757AD550-7737-CB8D-0101-608B7758A252}"/>
+                <a16:creationId xmlns:a16="http://schemas.microsoft.com/office/drawing/2014/main" id="{0A1854D7-6863-3F10-BA7F-5CC5BD292C96}"/>
               </a:ext>
             </a:extLst>
           </p:cNvPr>
@@ -2961,7 +2963,7 @@
           <p:cNvPr id="6" name="Foliennummernplatzhalter 5">
             <a:extLst>
               <a:ext uri="{FF2B5EF4-FFF2-40B4-BE49-F238E27FC236}">
-                <a16:creationId xmlns:a16="http://schemas.microsoft.com/office/drawing/2014/main" id="{0DA2496B-69B4-ED7A-566E-99AD49685AC7}"/>
+                <a16:creationId xmlns:a16="http://schemas.microsoft.com/office/drawing/2014/main" id="{78465519-15C8-BDD7-B35C-269C075DE9D8}"/>
               </a:ext>
             </a:extLst>
           </p:cNvPr>
@@ -2995,7 +2997,7 @@
             </a:lvl1pPr>
           </a:lstStyle>
           <a:p>
-            <a:fld id="{9B5EE1A3-B506-4AF2-B58B-53550434FE7F}" type="slidenum">
+            <a:fld id="{8B055827-EE37-4425-A60A-F41882E0FFD2}" type="slidenum">
               <a:rPr lang="de-DE" smtClean="0"/>
               <a:t>‹Nr.›</a:t>
             </a:fld>
@@ -3006,7 +3008,7 @@
     </p:spTree>
     <p:extLst>
       <p:ext uri="{BB962C8B-B14F-4D97-AF65-F5344CB8AC3E}">
-        <p14:creationId xmlns:p14="http://schemas.microsoft.com/office/powerpoint/2010/main" val="622000268"/>
+        <p14:creationId xmlns:p14="http://schemas.microsoft.com/office/powerpoint/2010/main" val="2697843253"/>
       </p:ext>
     </p:extLst>
   </p:cSld>
@@ -3329,7 +3331,7 @@
           <p:cNvPr id="2" name="Rechteck 1">
             <a:extLst>
               <a:ext uri="{FF2B5EF4-FFF2-40B4-BE49-F238E27FC236}">
-                <a16:creationId xmlns:a16="http://schemas.microsoft.com/office/drawing/2014/main" id="{AC50132F-756D-92DA-3318-07945C620A7F}"/>
+                <a16:creationId xmlns:a16="http://schemas.microsoft.com/office/drawing/2014/main" id="{F23BBE9F-EB97-3C3F-D121-FD639B30A33B}"/>
               </a:ext>
             </a:extLst>
           </p:cNvPr>
@@ -3401,7 +3403,7 @@
           <p:cNvPr id="3" name="Rechteck 2">
             <a:extLst>
               <a:ext uri="{FF2B5EF4-FFF2-40B4-BE49-F238E27FC236}">
-                <a16:creationId xmlns:a16="http://schemas.microsoft.com/office/drawing/2014/main" id="{82C9D5E2-A896-6958-CACB-BBB42C307204}"/>
+                <a16:creationId xmlns:a16="http://schemas.microsoft.com/office/drawing/2014/main" id="{1FA6FB05-5EAC-5C00-22F0-AFE8B8824DFA}"/>
               </a:ext>
             </a:extLst>
           </p:cNvPr>
@@ -3473,7 +3475,7 @@
           <p:cNvPr id="4" name="Rechteck 3">
             <a:extLst>
               <a:ext uri="{FF2B5EF4-FFF2-40B4-BE49-F238E27FC236}">
-                <a16:creationId xmlns:a16="http://schemas.microsoft.com/office/drawing/2014/main" id="{1BDBDA9F-E761-99C1-29D9-A43EED268EFF}"/>
+                <a16:creationId xmlns:a16="http://schemas.microsoft.com/office/drawing/2014/main" id="{723A9BA6-BE0F-9444-9825-CCC1A1AED962}"/>
               </a:ext>
             </a:extLst>
           </p:cNvPr>
@@ -3545,7 +3547,7 @@
           <p:cNvPr id="5" name="Rechteck 4">
             <a:extLst>
               <a:ext uri="{FF2B5EF4-FFF2-40B4-BE49-F238E27FC236}">
-                <a16:creationId xmlns:a16="http://schemas.microsoft.com/office/drawing/2014/main" id="{99275F4C-5C85-404B-40BD-6004496BA128}"/>
+                <a16:creationId xmlns:a16="http://schemas.microsoft.com/office/drawing/2014/main" id="{ECD14DD9-CDDD-EC83-80A9-B185FC84415D}"/>
               </a:ext>
             </a:extLst>
           </p:cNvPr>
@@ -3615,7 +3617,7 @@
           <p:cNvPr id="6" name="Rechteck 5">
             <a:extLst>
               <a:ext uri="{FF2B5EF4-FFF2-40B4-BE49-F238E27FC236}">
-                <a16:creationId xmlns:a16="http://schemas.microsoft.com/office/drawing/2014/main" id="{F647345A-E7EA-A09F-0658-9CBD8937B2A6}"/>
+                <a16:creationId xmlns:a16="http://schemas.microsoft.com/office/drawing/2014/main" id="{0106C833-766B-845A-1EF6-AC45A4221ABC}"/>
               </a:ext>
             </a:extLst>
           </p:cNvPr>
@@ -3685,7 +3687,7 @@
           <p:cNvPr id="7" name="Rechteck 6">
             <a:extLst>
               <a:ext uri="{FF2B5EF4-FFF2-40B4-BE49-F238E27FC236}">
-                <a16:creationId xmlns:a16="http://schemas.microsoft.com/office/drawing/2014/main" id="{F77FD156-62F3-CBE2-BCD1-4E930E208142}"/>
+                <a16:creationId xmlns:a16="http://schemas.microsoft.com/office/drawing/2014/main" id="{D174520D-04A2-FB4C-4183-D034EBA40514}"/>
               </a:ext>
             </a:extLst>
           </p:cNvPr>
@@ -3753,7 +3755,7 @@
     </p:spTree>
     <p:extLst>
       <p:ext uri="{BB962C8B-B14F-4D97-AF65-F5344CB8AC3E}">
-        <p14:creationId xmlns:p14="http://schemas.microsoft.com/office/powerpoint/2010/main" val="2853103208"/>
+        <p14:creationId xmlns:p14="http://schemas.microsoft.com/office/powerpoint/2010/main" val="61825061"/>
       </p:ext>
     </p:extLst>
   </p:cSld>
@@ -3785,7 +3787,7 @@
           <p:cNvPr id="2" name="Rechteck 1">
             <a:extLst>
               <a:ext uri="{FF2B5EF4-FFF2-40B4-BE49-F238E27FC236}">
-                <a16:creationId xmlns:a16="http://schemas.microsoft.com/office/drawing/2014/main" id="{7A6C20BD-CFF8-EAE9-8166-DC14541E0F20}"/>
+                <a16:creationId xmlns:a16="http://schemas.microsoft.com/office/drawing/2014/main" id="{885E43C0-6AA3-30CE-111A-A61DCC25E37E}"/>
               </a:ext>
             </a:extLst>
           </p:cNvPr>
@@ -3851,7 +3853,7 @@
           <p:cNvPr id="3" name="Rechteck 2">
             <a:extLst>
               <a:ext uri="{FF2B5EF4-FFF2-40B4-BE49-F238E27FC236}">
-                <a16:creationId xmlns:a16="http://schemas.microsoft.com/office/drawing/2014/main" id="{6AD6CE06-E2A4-43EE-A6D0-93B6204B8A53}"/>
+                <a16:creationId xmlns:a16="http://schemas.microsoft.com/office/drawing/2014/main" id="{16C2D3E4-59CD-8AE9-D72E-4161D49D59AF}"/>
               </a:ext>
             </a:extLst>
           </p:cNvPr>
@@ -3917,7 +3919,7 @@
           <p:cNvPr id="4" name="Rechteck 3">
             <a:extLst>
               <a:ext uri="{FF2B5EF4-FFF2-40B4-BE49-F238E27FC236}">
-                <a16:creationId xmlns:a16="http://schemas.microsoft.com/office/drawing/2014/main" id="{45A3CE60-B49A-E2D7-4608-D706A9C52C68}"/>
+                <a16:creationId xmlns:a16="http://schemas.microsoft.com/office/drawing/2014/main" id="{4927FD7D-A580-3BDA-6207-89731518C975}"/>
               </a:ext>
             </a:extLst>
           </p:cNvPr>
@@ -3986,7 +3988,7 @@
           <p:cNvPr id="5" name="Rechteck 4">
             <a:extLst>
               <a:ext uri="{FF2B5EF4-FFF2-40B4-BE49-F238E27FC236}">
-                <a16:creationId xmlns:a16="http://schemas.microsoft.com/office/drawing/2014/main" id="{BDD8AFAB-965E-CC1D-9A19-42A886E88912}"/>
+                <a16:creationId xmlns:a16="http://schemas.microsoft.com/office/drawing/2014/main" id="{00D4B47F-32CB-4E24-CED7-5901B0A4F684}"/>
               </a:ext>
             </a:extLst>
           </p:cNvPr>
@@ -4055,7 +4057,7 @@
           <p:cNvPr id="6" name="Rechteck 5">
             <a:extLst>
               <a:ext uri="{FF2B5EF4-FFF2-40B4-BE49-F238E27FC236}">
-                <a16:creationId xmlns:a16="http://schemas.microsoft.com/office/drawing/2014/main" id="{DEB93641-ABA2-4637-6040-3529AD4EC050}"/>
+                <a16:creationId xmlns:a16="http://schemas.microsoft.com/office/drawing/2014/main" id="{D03B9718-61D6-0E83-3353-1AADD37AA19E}"/>
               </a:ext>
             </a:extLst>
           </p:cNvPr>
@@ -4122,7 +4124,7 @@
     </p:spTree>
     <p:extLst>
       <p:ext uri="{BB962C8B-B14F-4D97-AF65-F5344CB8AC3E}">
-        <p14:creationId xmlns:p14="http://schemas.microsoft.com/office/powerpoint/2010/main" val="1726334352"/>
+        <p14:creationId xmlns:p14="http://schemas.microsoft.com/office/powerpoint/2010/main" val="2223191478"/>
       </p:ext>
     </p:extLst>
   </p:cSld>
@@ -4154,7 +4156,7 @@
           <p:cNvPr id="2" name="Rechteck 1">
             <a:extLst>
               <a:ext uri="{FF2B5EF4-FFF2-40B4-BE49-F238E27FC236}">
-                <a16:creationId xmlns:a16="http://schemas.microsoft.com/office/drawing/2014/main" id="{7F1DE8F2-0CE3-21F1-4BB5-C77C441EB413}"/>
+                <a16:creationId xmlns:a16="http://schemas.microsoft.com/office/drawing/2014/main" id="{57AA9D93-F385-4FD9-B8B3-524F230CB149}"/>
               </a:ext>
             </a:extLst>
           </p:cNvPr>
@@ -4215,7 +4217,7 @@
           <p:cNvPr id="3" name="Rechteck 2">
             <a:extLst>
               <a:ext uri="{FF2B5EF4-FFF2-40B4-BE49-F238E27FC236}">
-                <a16:creationId xmlns:a16="http://schemas.microsoft.com/office/drawing/2014/main" id="{F2319698-9839-15DF-5BCF-50925CA7A653}"/>
+                <a16:creationId xmlns:a16="http://schemas.microsoft.com/office/drawing/2014/main" id="{06BF208D-C891-CB0D-6487-2A2CE62D7E9D}"/>
               </a:ext>
             </a:extLst>
           </p:cNvPr>
@@ -4274,7 +4276,7 @@
     </p:spTree>
     <p:extLst>
       <p:ext uri="{BB962C8B-B14F-4D97-AF65-F5344CB8AC3E}">
-        <p14:creationId xmlns:p14="http://schemas.microsoft.com/office/powerpoint/2010/main" val="1047700366"/>
+        <p14:creationId xmlns:p14="http://schemas.microsoft.com/office/powerpoint/2010/main" val="3535756975"/>
       </p:ext>
     </p:extLst>
   </p:cSld>
@@ -4306,7 +4308,7 @@
           <p:cNvPr id="2" name="Rechteck 1">
             <a:extLst>
               <a:ext uri="{FF2B5EF4-FFF2-40B4-BE49-F238E27FC236}">
-                <a16:creationId xmlns:a16="http://schemas.microsoft.com/office/drawing/2014/main" id="{27A0256D-64BC-5848-0801-54C78584950D}"/>
+                <a16:creationId xmlns:a16="http://schemas.microsoft.com/office/drawing/2014/main" id="{D5CEF53C-1A38-79AC-2028-230BE0F2A81C}"/>
               </a:ext>
             </a:extLst>
           </p:cNvPr>
@@ -4369,7 +4371,7 @@
           <p:cNvPr id="3" name="Rechteck 2">
             <a:extLst>
               <a:ext uri="{FF2B5EF4-FFF2-40B4-BE49-F238E27FC236}">
-                <a16:creationId xmlns:a16="http://schemas.microsoft.com/office/drawing/2014/main" id="{F616EC76-B1D2-F05A-CC1A-019E683F5158}"/>
+                <a16:creationId xmlns:a16="http://schemas.microsoft.com/office/drawing/2014/main" id="{108C8774-63DC-591C-1E59-FF1FB65D7033}"/>
               </a:ext>
             </a:extLst>
           </p:cNvPr>
@@ -4432,7 +4434,7 @@
           <p:cNvPr id="4" name="Rechteck 3">
             <a:extLst>
               <a:ext uri="{FF2B5EF4-FFF2-40B4-BE49-F238E27FC236}">
-                <a16:creationId xmlns:a16="http://schemas.microsoft.com/office/drawing/2014/main" id="{A16E5B58-D155-A13D-9D8D-B1C70549361E}"/>
+                <a16:creationId xmlns:a16="http://schemas.microsoft.com/office/drawing/2014/main" id="{526A0717-3A2E-313F-2441-962AD12E3F74}"/>
               </a:ext>
             </a:extLst>
           </p:cNvPr>
@@ -4495,7 +4497,7 @@
           <p:cNvPr id="5" name="Rechteck 4">
             <a:extLst>
               <a:ext uri="{FF2B5EF4-FFF2-40B4-BE49-F238E27FC236}">
-                <a16:creationId xmlns:a16="http://schemas.microsoft.com/office/drawing/2014/main" id="{71D4734D-C18C-8C20-97EC-2D3E7CF73CB1}"/>
+                <a16:creationId xmlns:a16="http://schemas.microsoft.com/office/drawing/2014/main" id="{6F124AC3-1886-EE2C-A6F0-2265320711E6}"/>
               </a:ext>
             </a:extLst>
           </p:cNvPr>
@@ -4559,7 +4561,1019 @@
     </p:spTree>
     <p:extLst>
       <p:ext uri="{BB962C8B-B14F-4D97-AF65-F5344CB8AC3E}">
-        <p14:creationId xmlns:p14="http://schemas.microsoft.com/office/powerpoint/2010/main" val="2741566895"/>
+        <p14:creationId xmlns:p14="http://schemas.microsoft.com/office/powerpoint/2010/main" val="3964996417"/>
+      </p:ext>
+    </p:extLst>
+  </p:cSld>
+  <p:clrMapOvr>
+    <a:masterClrMapping/>
+  </p:clrMapOvr>
+</p:sld>
+</file>
+
+<file path=ppt/slides/slide5.xml><?xml version="1.0" encoding="utf-8"?>
+<p:sld xmlns:a="http://schemas.openxmlformats.org/drawingml/2006/main" xmlns:r="http://schemas.openxmlformats.org/officeDocument/2006/relationships" xmlns:p="http://schemas.openxmlformats.org/presentationml/2006/main">
+  <p:cSld>
+    <p:spTree>
+      <p:nvGrpSpPr>
+        <p:cNvPr id="1" name=""/>
+        <p:cNvGrpSpPr/>
+        <p:nvPr/>
+      </p:nvGrpSpPr>
+      <p:grpSpPr>
+        <a:xfrm>
+          <a:off x="0" y="0"/>
+          <a:ext cx="0" cy="0"/>
+          <a:chOff x="0" y="0"/>
+          <a:chExt cx="0" cy="0"/>
+        </a:xfrm>
+      </p:grpSpPr>
+      <p:sp>
+        <p:nvSpPr>
+          <p:cNvPr id="2" name="fontAlgn-t">
+            <a:extLst>
+              <a:ext uri="{FF2B5EF4-FFF2-40B4-BE49-F238E27FC236}">
+                <a16:creationId xmlns:a16="http://schemas.microsoft.com/office/drawing/2014/main" id="{DB308640-B912-31D0-4019-8E9D1404A244}"/>
+              </a:ext>
+            </a:extLst>
+          </p:cNvPr>
+          <p:cNvSpPr/>
+          <p:nvPr/>
+        </p:nvSpPr>
+        <p:spPr>
+          <a:xfrm>
+            <a:off x="381000" y="381000"/>
+            <a:ext cx="2667000" cy="1397000"/>
+          </a:xfrm>
+          <a:prstGeom prst="rect">
+            <a:avLst/>
+          </a:prstGeom>
+          <a:solidFill>
+            <a:srgbClr val="DEEBF7"/>
+          </a:solidFill>
+          <a:ln>
+            <a:solidFill>
+              <a:srgbClr val="4472C4"/>
+            </a:solidFill>
+          </a:ln>
+        </p:spPr>
+        <p:style>
+          <a:lnRef idx="2">
+            <a:schemeClr val="accent1">
+              <a:shade val="15000"/>
+            </a:schemeClr>
+          </a:lnRef>
+          <a:fillRef idx="1">
+            <a:schemeClr val="accent1"/>
+          </a:fillRef>
+          <a:effectRef idx="0">
+            <a:schemeClr val="accent1"/>
+          </a:effectRef>
+          <a:fontRef idx="minor">
+            <a:schemeClr val="lt1"/>
+          </a:fontRef>
+        </p:style>
+        <p:txBody>
+          <a:bodyPr rtlCol="0" anchor="ctr"/>
+          <a:lstStyle/>
+          <a:p>
+            <a:pPr algn="ctr" fontAlgn="t"/>
+            <a:r>
+              <a:rPr lang="de-DE" sz="3600">
+                <a:solidFill>
+                  <a:srgbClr val="000000"/>
+                </a:solidFill>
+              </a:rPr>
+              <a:t>Big</a:t>
+            </a:r>
+            <a:r>
+              <a:rPr lang="de-DE">
+                <a:solidFill>
+                  <a:srgbClr val="000000"/>
+                </a:solidFill>
+              </a:rPr>
+              <a:t/>
+            </a:r>
+            <a:r>
+              <a:rPr lang="de-DE" sz="1000">
+                <a:solidFill>
+                  <a:srgbClr val="000000"/>
+                </a:solidFill>
+              </a:rPr>
+              <a:t>small</a:t>
+            </a:r>
+            <a:r>
+              <a:rPr lang="de-DE">
+                <a:solidFill>
+                  <a:srgbClr val="000000"/>
+                </a:solidFill>
+              </a:rPr>
+              <a:t> Big</a:t>
+            </a:r>
+          </a:p>
+        </p:txBody>
+      </p:sp>
+      <p:sp>
+        <p:nvSpPr>
+          <p:cNvPr id="3" name="fontAlgn-ctr">
+            <a:extLst>
+              <a:ext uri="{FF2B5EF4-FFF2-40B4-BE49-F238E27FC236}">
+                <a16:creationId xmlns:a16="http://schemas.microsoft.com/office/drawing/2014/main" id="{BC754AD8-4AA3-14C8-41DB-38EDD423EFCE}"/>
+              </a:ext>
+            </a:extLst>
+          </p:cNvPr>
+          <p:cNvSpPr/>
+          <p:nvPr/>
+        </p:nvSpPr>
+        <p:spPr>
+          <a:xfrm>
+            <a:off x="3302000" y="381000"/>
+            <a:ext cx="2667000" cy="1397000"/>
+          </a:xfrm>
+          <a:prstGeom prst="rect">
+            <a:avLst/>
+          </a:prstGeom>
+          <a:solidFill>
+            <a:srgbClr val="DEEBF7"/>
+          </a:solidFill>
+          <a:ln>
+            <a:solidFill>
+              <a:srgbClr val="4472C4"/>
+            </a:solidFill>
+          </a:ln>
+        </p:spPr>
+        <p:style>
+          <a:lnRef idx="2">
+            <a:schemeClr val="accent1">
+              <a:shade val="15000"/>
+            </a:schemeClr>
+          </a:lnRef>
+          <a:fillRef idx="1">
+            <a:schemeClr val="accent1"/>
+          </a:fillRef>
+          <a:effectRef idx="0">
+            <a:schemeClr val="accent1"/>
+          </a:effectRef>
+          <a:fontRef idx="minor">
+            <a:schemeClr val="lt1"/>
+          </a:fontRef>
+        </p:style>
+        <p:txBody>
+          <a:bodyPr rtlCol="0" anchor="ctr"/>
+          <a:lstStyle/>
+          <a:p>
+            <a:pPr algn="ctr" fontAlgn="ctr"/>
+            <a:r>
+              <a:rPr lang="de-DE" sz="3600">
+                <a:solidFill>
+                  <a:srgbClr val="000000"/>
+                </a:solidFill>
+              </a:rPr>
+              <a:t>Big</a:t>
+            </a:r>
+            <a:r>
+              <a:rPr lang="de-DE">
+                <a:solidFill>
+                  <a:srgbClr val="000000"/>
+                </a:solidFill>
+              </a:rPr>
+              <a:t/>
+            </a:r>
+            <a:r>
+              <a:rPr lang="de-DE" sz="1000">
+                <a:solidFill>
+                  <a:srgbClr val="000000"/>
+                </a:solidFill>
+              </a:rPr>
+              <a:t>small</a:t>
+            </a:r>
+            <a:r>
+              <a:rPr lang="de-DE">
+                <a:solidFill>
+                  <a:srgbClr val="000000"/>
+                </a:solidFill>
+              </a:rPr>
+              <a:t> Big</a:t>
+            </a:r>
+          </a:p>
+        </p:txBody>
+      </p:sp>
+      <p:sp>
+        <p:nvSpPr>
+          <p:cNvPr id="4" name="fontAlgn-b">
+            <a:extLst>
+              <a:ext uri="{FF2B5EF4-FFF2-40B4-BE49-F238E27FC236}">
+                <a16:creationId xmlns:a16="http://schemas.microsoft.com/office/drawing/2014/main" id="{82F2B2CB-7718-AC43-678D-EB407CC2F757}"/>
+              </a:ext>
+            </a:extLst>
+          </p:cNvPr>
+          <p:cNvSpPr/>
+          <p:nvPr/>
+        </p:nvSpPr>
+        <p:spPr>
+          <a:xfrm>
+            <a:off x="6223000" y="381000"/>
+            <a:ext cx="2667000" cy="1397000"/>
+          </a:xfrm>
+          <a:prstGeom prst="rect">
+            <a:avLst/>
+          </a:prstGeom>
+          <a:solidFill>
+            <a:srgbClr val="DEEBF7"/>
+          </a:solidFill>
+          <a:ln>
+            <a:solidFill>
+              <a:srgbClr val="4472C4"/>
+            </a:solidFill>
+          </a:ln>
+        </p:spPr>
+        <p:style>
+          <a:lnRef idx="2">
+            <a:schemeClr val="accent1">
+              <a:shade val="15000"/>
+            </a:schemeClr>
+          </a:lnRef>
+          <a:fillRef idx="1">
+            <a:schemeClr val="accent1"/>
+          </a:fillRef>
+          <a:effectRef idx="0">
+            <a:schemeClr val="accent1"/>
+          </a:effectRef>
+          <a:fontRef idx="minor">
+            <a:schemeClr val="lt1"/>
+          </a:fontRef>
+        </p:style>
+        <p:txBody>
+          <a:bodyPr rtlCol="0" anchor="ctr"/>
+          <a:lstStyle/>
+          <a:p>
+            <a:pPr algn="ctr" fontAlgn="b"/>
+            <a:r>
+              <a:rPr lang="de-DE" sz="3600">
+                <a:solidFill>
+                  <a:srgbClr val="000000"/>
+                </a:solidFill>
+              </a:rPr>
+              <a:t>Big</a:t>
+            </a:r>
+            <a:r>
+              <a:rPr lang="de-DE">
+                <a:solidFill>
+                  <a:srgbClr val="000000"/>
+                </a:solidFill>
+              </a:rPr>
+              <a:t/>
+            </a:r>
+            <a:r>
+              <a:rPr lang="de-DE" sz="1000">
+                <a:solidFill>
+                  <a:srgbClr val="000000"/>
+                </a:solidFill>
+              </a:rPr>
+              <a:t>small</a:t>
+            </a:r>
+            <a:r>
+              <a:rPr lang="de-DE">
+                <a:solidFill>
+                  <a:srgbClr val="000000"/>
+                </a:solidFill>
+              </a:rPr>
+              <a:t> Big</a:t>
+            </a:r>
+          </a:p>
+        </p:txBody>
+      </p:sp>
+      <p:sp>
+        <p:nvSpPr>
+          <p:cNvPr id="5" name="fontAlgn-base">
+            <a:extLst>
+              <a:ext uri="{FF2B5EF4-FFF2-40B4-BE49-F238E27FC236}">
+                <a16:creationId xmlns:a16="http://schemas.microsoft.com/office/drawing/2014/main" id="{2EB6AA2B-E8D9-2571-FB1F-7116932B73CA}"/>
+              </a:ext>
+            </a:extLst>
+          </p:cNvPr>
+          <p:cNvSpPr/>
+          <p:nvPr/>
+        </p:nvSpPr>
+        <p:spPr>
+          <a:xfrm>
+            <a:off x="9144000" y="381000"/>
+            <a:ext cx="2667000" cy="1397000"/>
+          </a:xfrm>
+          <a:prstGeom prst="rect">
+            <a:avLst/>
+          </a:prstGeom>
+          <a:solidFill>
+            <a:srgbClr val="DEEBF7"/>
+          </a:solidFill>
+          <a:ln>
+            <a:solidFill>
+              <a:srgbClr val="4472C4"/>
+            </a:solidFill>
+          </a:ln>
+        </p:spPr>
+        <p:style>
+          <a:lnRef idx="2">
+            <a:schemeClr val="accent1">
+              <a:shade val="15000"/>
+            </a:schemeClr>
+          </a:lnRef>
+          <a:fillRef idx="1">
+            <a:schemeClr val="accent1"/>
+          </a:fillRef>
+          <a:effectRef idx="0">
+            <a:schemeClr val="accent1"/>
+          </a:effectRef>
+          <a:fontRef idx="minor">
+            <a:schemeClr val="lt1"/>
+          </a:fontRef>
+        </p:style>
+        <p:txBody>
+          <a:bodyPr rtlCol="0" anchor="ctr"/>
+          <a:lstStyle/>
+          <a:p>
+            <a:pPr algn="ctr" fontAlgn="base"/>
+            <a:r>
+              <a:rPr lang="de-DE" sz="3600">
+                <a:solidFill>
+                  <a:srgbClr val="000000"/>
+                </a:solidFill>
+              </a:rPr>
+              <a:t>Big</a:t>
+            </a:r>
+            <a:r>
+              <a:rPr lang="de-DE">
+                <a:solidFill>
+                  <a:srgbClr val="000000"/>
+                </a:solidFill>
+              </a:rPr>
+              <a:t/>
+            </a:r>
+            <a:r>
+              <a:rPr lang="de-DE" sz="1000">
+                <a:solidFill>
+                  <a:srgbClr val="000000"/>
+                </a:solidFill>
+              </a:rPr>
+              <a:t>small</a:t>
+            </a:r>
+            <a:r>
+              <a:rPr lang="de-DE">
+                <a:solidFill>
+                  <a:srgbClr val="000000"/>
+                </a:solidFill>
+              </a:rPr>
+              <a:t> Big</a:t>
+            </a:r>
+          </a:p>
+        </p:txBody>
+      </p:sp>
+      <p:sp>
+        <p:nvSpPr>
+          <p:cNvPr id="6" name="arch-wordart">
+            <a:extLst>
+              <a:ext uri="{FF2B5EF4-FFF2-40B4-BE49-F238E27FC236}">
+                <a16:creationId xmlns:a16="http://schemas.microsoft.com/office/drawing/2014/main" id="{B37779C4-D6ED-519B-BFD6-CE2315BB1287}"/>
+              </a:ext>
+            </a:extLst>
+          </p:cNvPr>
+          <p:cNvSpPr/>
+          <p:nvPr/>
+        </p:nvSpPr>
+        <p:spPr>
+          <a:xfrm>
+            <a:off x="381000" y="3302000"/>
+            <a:ext cx="5080000" cy="1397000"/>
+          </a:xfrm>
+          <a:prstGeom prst="rect">
+            <a:avLst/>
+          </a:prstGeom>
+          <a:solidFill>
+            <a:srgbClr val="DEEBF7"/>
+          </a:solidFill>
+          <a:ln>
+            <a:solidFill>
+              <a:srgbClr val="4472C4"/>
+            </a:solidFill>
+          </a:ln>
+        </p:spPr>
+        <p:style>
+          <a:lnRef idx="2">
+            <a:schemeClr val="accent1">
+              <a:shade val="15000"/>
+            </a:schemeClr>
+          </a:lnRef>
+          <a:fillRef idx="1">
+            <a:schemeClr val="accent1"/>
+          </a:fillRef>
+          <a:effectRef idx="0">
+            <a:schemeClr val="accent1"/>
+          </a:effectRef>
+          <a:fontRef idx="minor">
+            <a:schemeClr val="lt1"/>
+          </a:fontRef>
+        </p:style>
+        <p:txBody>
+          <a:bodyPr rtlCol="0" anchor="ctr" fromWordArt="1">
+            <a:prstTxWarp prst="textArchUp">
+              <a:avLst/>
+            </a:prstTxWarp>
+          </a:bodyPr>
+          <a:lstStyle/>
+          <a:p>
+            <a:r>
+              <a:rPr lang="de-DE" sz="2800">
+                <a:solidFill>
+                  <a:srgbClr val="000000"/>
+                </a:solidFill>
+              </a:rPr>
+              <a:t>WordArt text</a:t>
+            </a:r>
+          </a:p>
+        </p:txBody>
+      </p:sp>
+      <p:sp>
+        <p:nvSpPr>
+          <p:cNvPr id="7" name="arch">
+            <a:extLst>
+              <a:ext uri="{FF2B5EF4-FFF2-40B4-BE49-F238E27FC236}">
+                <a16:creationId xmlns:a16="http://schemas.microsoft.com/office/drawing/2014/main" id="{255C4EDF-A772-8A89-6936-1B0ED438598D}"/>
+              </a:ext>
+            </a:extLst>
+          </p:cNvPr>
+          <p:cNvSpPr/>
+          <p:nvPr/>
+        </p:nvSpPr>
+        <p:spPr>
+          <a:xfrm>
+            <a:off x="6350000" y="3302000"/>
+            <a:ext cx="5080000" cy="1397000"/>
+          </a:xfrm>
+          <a:prstGeom prst="rect">
+            <a:avLst/>
+          </a:prstGeom>
+          <a:solidFill>
+            <a:srgbClr val="DEEBF7"/>
+          </a:solidFill>
+          <a:ln>
+            <a:solidFill>
+              <a:srgbClr val="4472C4"/>
+            </a:solidFill>
+          </a:ln>
+        </p:spPr>
+        <p:style>
+          <a:lnRef idx="2">
+            <a:schemeClr val="accent1">
+              <a:shade val="15000"/>
+            </a:schemeClr>
+          </a:lnRef>
+          <a:fillRef idx="1">
+            <a:schemeClr val="accent1"/>
+          </a:fillRef>
+          <a:effectRef idx="0">
+            <a:schemeClr val="accent1"/>
+          </a:effectRef>
+          <a:fontRef idx="minor">
+            <a:schemeClr val="lt1"/>
+          </a:fontRef>
+        </p:style>
+        <p:txBody>
+          <a:bodyPr rtlCol="0" anchor="ctr">
+            <a:prstTxWarp prst="textArchUp">
+              <a:avLst/>
+            </a:prstTxWarp>
+          </a:bodyPr>
+          <a:lstStyle/>
+          <a:p>
+            <a:r>
+              <a:rPr lang="de-DE" sz="2800">
+                <a:solidFill>
+                  <a:srgbClr val="000000"/>
+                </a:solidFill>
+              </a:rPr>
+              <a:t>WordArt text</a:t>
+            </a:r>
+          </a:p>
+        </p:txBody>
+      </p:sp>
+    </p:spTree>
+    <p:extLst>
+      <p:ext uri="{BB962C8B-B14F-4D97-AF65-F5344CB8AC3E}">
+        <p14:creationId xmlns:p14="http://schemas.microsoft.com/office/powerpoint/2010/main" val="3228572274"/>
+      </p:ext>
+    </p:extLst>
+  </p:cSld>
+  <p:clrMapOvr>
+    <a:masterClrMapping/>
+  </p:clrMapOvr>
+</p:sld>
+</file>
+
+<file path=ppt/slides/slide6.xml><?xml version="1.0" encoding="utf-8"?>
+<p:sld xmlns:a="http://schemas.openxmlformats.org/drawingml/2006/main" xmlns:r="http://schemas.openxmlformats.org/officeDocument/2006/relationships" xmlns:p="http://schemas.openxmlformats.org/presentationml/2006/main">
+  <p:cSld>
+    <p:spTree>
+      <p:nvGrpSpPr>
+        <p:cNvPr id="1" name=""/>
+        <p:cNvGrpSpPr/>
+        <p:nvPr/>
+      </p:nvGrpSpPr>
+      <p:grpSpPr>
+        <a:xfrm>
+          <a:off x="0" y="0"/>
+          <a:ext cx="0" cy="0"/>
+          <a:chOff x="0" y="0"/>
+          <a:chExt cx="0" cy="0"/>
+        </a:xfrm>
+      </p:grpSpPr>
+      <p:sp>
+        <p:nvSpPr>
+          <p:cNvPr id="2" name="ellipsis">
+            <a:extLst>
+              <a:ext uri="{FF2B5EF4-FFF2-40B4-BE49-F238E27FC236}">
+                <a16:creationId xmlns:a16="http://schemas.microsoft.com/office/drawing/2014/main" id="{DD01823F-6E73-5DF5-1E1E-361753D65F44}"/>
+              </a:ext>
+            </a:extLst>
+          </p:cNvPr>
+          <p:cNvSpPr/>
+          <p:nvPr/>
+        </p:nvSpPr>
+        <p:spPr>
+          <a:xfrm>
+            <a:off x="381000" y="381000"/>
+            <a:ext cx="3556000" cy="1143000"/>
+          </a:xfrm>
+          <a:prstGeom prst="rect">
+            <a:avLst/>
+          </a:prstGeom>
+          <a:solidFill>
+            <a:srgbClr val="DEEBF7"/>
+          </a:solidFill>
+          <a:ln>
+            <a:solidFill>
+              <a:srgbClr val="4472C4"/>
+            </a:solidFill>
+          </a:ln>
+        </p:spPr>
+        <p:style>
+          <a:lnRef idx="2">
+            <a:schemeClr val="accent1">
+              <a:shade val="15000"/>
+            </a:schemeClr>
+          </a:lnRef>
+          <a:fillRef idx="1">
+            <a:schemeClr val="accent1"/>
+          </a:fillRef>
+          <a:effectRef idx="0">
+            <a:schemeClr val="accent1"/>
+          </a:effectRef>
+          <a:fontRef idx="minor">
+            <a:schemeClr val="lt1"/>
+          </a:fontRef>
+        </p:style>
+        <p:txBody>
+          <a:bodyPr rtlCol="0" anchor="ctr" vertOverflow="ellipsis"/>
+          <a:lstStyle/>
+          <a:p>
+            <a:pPr algn="ctr"/>
+            <a:r>
+              <a:rPr lang="de-DE">
+                <a:solidFill>
+                  <a:srgbClr val="000000"/>
+                </a:solidFill>
+              </a:rPr>
+              <a:t>Lorem ipsum dolor sit amet consectetur elit Lorem ipsum dolor sit amet consectetur elit Lorem ipsum dolor sit amet consectetur elit Lorem ipsum dolor sit amet consectetur elit Lorem ipsum dolor sit amet consectetur elit Lorem ipsum dolor sit amet</a:t>
+            </a:r>
+          </a:p>
+        </p:txBody>
+      </p:sp>
+      <p:sp>
+        <p:nvSpPr>
+          <p:cNvPr id="3" name="clip">
+            <a:extLst>
+              <a:ext uri="{FF2B5EF4-FFF2-40B4-BE49-F238E27FC236}">
+                <a16:creationId xmlns:a16="http://schemas.microsoft.com/office/drawing/2014/main" id="{931A79E0-49D1-5BE7-A04E-79009C4EB20A}"/>
+              </a:ext>
+            </a:extLst>
+          </p:cNvPr>
+          <p:cNvSpPr/>
+          <p:nvPr/>
+        </p:nvSpPr>
+        <p:spPr>
+          <a:xfrm>
+            <a:off x="4318000" y="381000"/>
+            <a:ext cx="3556000" cy="1143000"/>
+          </a:xfrm>
+          <a:prstGeom prst="rect">
+            <a:avLst/>
+          </a:prstGeom>
+          <a:solidFill>
+            <a:srgbClr val="DEEBF7"/>
+          </a:solidFill>
+          <a:ln>
+            <a:solidFill>
+              <a:srgbClr val="4472C4"/>
+            </a:solidFill>
+          </a:ln>
+        </p:spPr>
+        <p:style>
+          <a:lnRef idx="2">
+            <a:schemeClr val="accent1">
+              <a:shade val="15000"/>
+            </a:schemeClr>
+          </a:lnRef>
+          <a:fillRef idx="1">
+            <a:schemeClr val="accent1"/>
+          </a:fillRef>
+          <a:effectRef idx="0">
+            <a:schemeClr val="accent1"/>
+          </a:effectRef>
+          <a:fontRef idx="minor">
+            <a:schemeClr val="lt1"/>
+          </a:fontRef>
+        </p:style>
+        <p:txBody>
+          <a:bodyPr rtlCol="0" anchor="ctr" vertOverflow="clip"/>
+          <a:lstStyle/>
+          <a:p>
+            <a:pPr algn="ctr"/>
+            <a:r>
+              <a:rPr lang="de-DE">
+                <a:solidFill>
+                  <a:srgbClr val="000000"/>
+                </a:solidFill>
+              </a:rPr>
+              <a:t>Lorem ipsum dolor sit amet consectetur elit Lorem ipsum dolor sit amet consectetur elit Lorem ipsum dolor sit amet consectetur elit Lorem ipsum dolor sit amet consectetur elit Lorem ipsum dolor sit amet consectetur elit Lorem ipsum dolor sit amet</a:t>
+            </a:r>
+          </a:p>
+        </p:txBody>
+      </p:sp>
+      <p:sp>
+        <p:nvSpPr>
+          <p:cNvPr id="4" name="overflow">
+            <a:extLst>
+              <a:ext uri="{FF2B5EF4-FFF2-40B4-BE49-F238E27FC236}">
+                <a16:creationId xmlns:a16="http://schemas.microsoft.com/office/drawing/2014/main" id="{62B73280-C369-40EF-60A3-5349C8151F11}"/>
+              </a:ext>
+            </a:extLst>
+          </p:cNvPr>
+          <p:cNvSpPr/>
+          <p:nvPr/>
+        </p:nvSpPr>
+        <p:spPr>
+          <a:xfrm>
+            <a:off x="8255000" y="381000"/>
+            <a:ext cx="3556000" cy="1143000"/>
+          </a:xfrm>
+          <a:prstGeom prst="rect">
+            <a:avLst/>
+          </a:prstGeom>
+          <a:solidFill>
+            <a:srgbClr val="DEEBF7"/>
+          </a:solidFill>
+          <a:ln>
+            <a:solidFill>
+              <a:srgbClr val="4472C4"/>
+            </a:solidFill>
+          </a:ln>
+        </p:spPr>
+        <p:style>
+          <a:lnRef idx="2">
+            <a:schemeClr val="accent1">
+              <a:shade val="15000"/>
+            </a:schemeClr>
+          </a:lnRef>
+          <a:fillRef idx="1">
+            <a:schemeClr val="accent1"/>
+          </a:fillRef>
+          <a:effectRef idx="0">
+            <a:schemeClr val="accent1"/>
+          </a:effectRef>
+          <a:fontRef idx="minor">
+            <a:schemeClr val="lt1"/>
+          </a:fontRef>
+        </p:style>
+        <p:txBody>
+          <a:bodyPr rtlCol="0" anchor="ctr"/>
+          <a:lstStyle/>
+          <a:p>
+            <a:pPr algn="ctr"/>
+            <a:r>
+              <a:rPr lang="de-DE">
+                <a:solidFill>
+                  <a:srgbClr val="000000"/>
+                </a:solidFill>
+              </a:rPr>
+              <a:t>Lorem ipsum dolor sit amet consectetur elit Lorem ipsum dolor sit amet consectetur elit Lorem ipsum dolor sit amet consectetur elit Lorem ipsum dolor sit amet consectetur elit Lorem ipsum dolor sit amet consectetur elit Lorem ipsum dolor sit amet</a:t>
+            </a:r>
+          </a:p>
+        </p:txBody>
+      </p:sp>
+      <p:sp>
+        <p:nvSpPr>
+          <p:cNvPr id="5" name="horzClip">
+            <a:extLst>
+              <a:ext uri="{FF2B5EF4-FFF2-40B4-BE49-F238E27FC236}">
+                <a16:creationId xmlns:a16="http://schemas.microsoft.com/office/drawing/2014/main" id="{5F1822DB-4638-DED9-2B7E-8DC1081C00A7}"/>
+              </a:ext>
+            </a:extLst>
+          </p:cNvPr>
+          <p:cNvSpPr/>
+          <p:nvPr/>
+        </p:nvSpPr>
+        <p:spPr>
+          <a:xfrm>
+            <a:off x="381000" y="2921000"/>
+            <a:ext cx="2540000" cy="889000"/>
+          </a:xfrm>
+          <a:prstGeom prst="rect">
+            <a:avLst/>
+          </a:prstGeom>
+          <a:solidFill>
+            <a:srgbClr val="DEEBF7"/>
+          </a:solidFill>
+          <a:ln>
+            <a:solidFill>
+              <a:srgbClr val="4472C4"/>
+            </a:solidFill>
+          </a:ln>
+        </p:spPr>
+        <p:style>
+          <a:lnRef idx="2">
+            <a:schemeClr val="accent1">
+              <a:shade val="15000"/>
+            </a:schemeClr>
+          </a:lnRef>
+          <a:fillRef idx="1">
+            <a:schemeClr val="accent1"/>
+          </a:fillRef>
+          <a:effectRef idx="0">
+            <a:schemeClr val="accent1"/>
+          </a:effectRef>
+          <a:fontRef idx="minor">
+            <a:schemeClr val="lt1"/>
+          </a:fontRef>
+        </p:style>
+        <p:txBody>
+          <a:bodyPr wrap="none" rtlCol="0" anchor="ctr" horzOverflow="clip"/>
+          <a:lstStyle/>
+          <a:p>
+            <a:pPr algn="ctr"/>
+            <a:r>
+              <a:rPr lang="de-DE">
+                <a:solidFill>
+                  <a:srgbClr val="000000"/>
+                </a:solidFill>
+              </a:rPr>
+              <a:t>NoWrapLongWordThatIsWider</a:t>
+            </a:r>
+          </a:p>
+        </p:txBody>
+      </p:sp>
+      <p:sp>
+        <p:nvSpPr>
+          <p:cNvPr id="6" name="spcFirstLast-t">
+            <a:extLst>
+              <a:ext uri="{FF2B5EF4-FFF2-40B4-BE49-F238E27FC236}">
+                <a16:creationId xmlns:a16="http://schemas.microsoft.com/office/drawing/2014/main" id="{0CB7207F-1CE5-A06A-5D9F-1B37FB97D6D7}"/>
+              </a:ext>
+            </a:extLst>
+          </p:cNvPr>
+          <p:cNvSpPr/>
+          <p:nvPr/>
+        </p:nvSpPr>
+        <p:spPr>
+          <a:xfrm>
+            <a:off x="4318000" y="2921000"/>
+            <a:ext cx="3556000" cy="1778000"/>
+          </a:xfrm>
+          <a:prstGeom prst="rect">
+            <a:avLst/>
+          </a:prstGeom>
+          <a:solidFill>
+            <a:srgbClr val="DEEBF7"/>
+          </a:solidFill>
+          <a:ln>
+            <a:solidFill>
+              <a:srgbClr val="4472C4"/>
+            </a:solidFill>
+          </a:ln>
+        </p:spPr>
+        <p:style>
+          <a:lnRef idx="2">
+            <a:schemeClr val="accent1">
+              <a:shade val="15000"/>
+            </a:schemeClr>
+          </a:lnRef>
+          <a:fillRef idx="1">
+            <a:schemeClr val="accent1"/>
+          </a:fillRef>
+          <a:effectRef idx="0">
+            <a:schemeClr val="accent1"/>
+          </a:effectRef>
+          <a:fontRef idx="minor">
+            <a:schemeClr val="lt1"/>
+          </a:fontRef>
+        </p:style>
+        <p:txBody>
+          <a:bodyPr rtlCol="0" anchor="t" spcFirstLastPara="1"/>
+          <a:lstStyle/>
+          <a:p>
+            <a:pPr algn="ctr">
+              <a:spcBef>
+                <a:spcPts val="3000"/>
+              </a:spcBef>
+            </a:pPr>
+            <a:r>
+              <a:rPr lang="de-DE">
+                <a:solidFill>
+                  <a:srgbClr val="000000"/>
+                </a:solidFill>
+              </a:rPr>
+              <a:t>First</a:t>
+            </a:r>
+          </a:p>
+          <a:p>
+            <a:pPr algn="ctr">
+              <a:spcAft>
+                <a:spcPts val="3000"/>
+              </a:spcAft>
+            </a:pPr>
+            <a:r>
+              <a:rPr lang="de-DE">
+                <a:solidFill>
+                  <a:srgbClr val="000000"/>
+                </a:solidFill>
+              </a:rPr>
+              <a:t>Second</a:t>
+            </a:r>
+          </a:p>
+        </p:txBody>
+      </p:sp>
+      <p:sp>
+        <p:nvSpPr>
+          <p:cNvPr id="7" name="spcFirstLast-b">
+            <a:extLst>
+              <a:ext uri="{FF2B5EF4-FFF2-40B4-BE49-F238E27FC236}">
+                <a16:creationId xmlns:a16="http://schemas.microsoft.com/office/drawing/2014/main" id="{338F7348-5A9C-01AA-BD86-02E29D9D31C5}"/>
+              </a:ext>
+            </a:extLst>
+          </p:cNvPr>
+          <p:cNvSpPr/>
+          <p:nvPr/>
+        </p:nvSpPr>
+        <p:spPr>
+          <a:xfrm>
+            <a:off x="8255000" y="2921000"/>
+            <a:ext cx="3556000" cy="1778000"/>
+          </a:xfrm>
+          <a:prstGeom prst="rect">
+            <a:avLst/>
+          </a:prstGeom>
+          <a:solidFill>
+            <a:srgbClr val="DEEBF7"/>
+          </a:solidFill>
+          <a:ln>
+            <a:solidFill>
+              <a:srgbClr val="4472C4"/>
+            </a:solidFill>
+          </a:ln>
+        </p:spPr>
+        <p:style>
+          <a:lnRef idx="2">
+            <a:schemeClr val="accent1">
+              <a:shade val="15000"/>
+            </a:schemeClr>
+          </a:lnRef>
+          <a:fillRef idx="1">
+            <a:schemeClr val="accent1"/>
+          </a:fillRef>
+          <a:effectRef idx="0">
+            <a:schemeClr val="accent1"/>
+          </a:effectRef>
+          <a:fontRef idx="minor">
+            <a:schemeClr val="lt1"/>
+          </a:fontRef>
+        </p:style>
+        <p:txBody>
+          <a:bodyPr rtlCol="0" anchor="b" spcFirstLastPara="1"/>
+          <a:lstStyle/>
+          <a:p>
+            <a:pPr algn="ctr">
+              <a:spcBef>
+                <a:spcPts val="3000"/>
+              </a:spcBef>
+            </a:pPr>
+            <a:r>
+              <a:rPr lang="de-DE">
+                <a:solidFill>
+                  <a:srgbClr val="000000"/>
+                </a:solidFill>
+              </a:rPr>
+              <a:t>First</a:t>
+            </a:r>
+          </a:p>
+          <a:p>
+            <a:pPr algn="ctr">
+              <a:spcAft>
+                <a:spcPts val="3000"/>
+              </a:spcAft>
+            </a:pPr>
+            <a:r>
+              <a:rPr lang="de-DE">
+                <a:solidFill>
+                  <a:srgbClr val="000000"/>
+                </a:solidFill>
+              </a:rPr>
+              <a:t>Second</a:t>
+            </a:r>
+          </a:p>
+        </p:txBody>
+      </p:sp>
+      <p:sp>
+        <p:nvSpPr>
+          <p:cNvPr id="8" name="spcDefault-b">
+            <a:extLst>
+              <a:ext uri="{FF2B5EF4-FFF2-40B4-BE49-F238E27FC236}">
+                <a16:creationId xmlns:a16="http://schemas.microsoft.com/office/drawing/2014/main" id="{1CECB375-6554-10FE-D391-AADB48C3C617}"/>
+              </a:ext>
+            </a:extLst>
+          </p:cNvPr>
+          <p:cNvSpPr/>
+          <p:nvPr/>
+        </p:nvSpPr>
+        <p:spPr>
+          <a:xfrm>
+            <a:off x="8255000" y="4826000"/>
+            <a:ext cx="3556000" cy="1778000"/>
+          </a:xfrm>
+          <a:prstGeom prst="rect">
+            <a:avLst/>
+          </a:prstGeom>
+          <a:solidFill>
+            <a:srgbClr val="DEEBF7"/>
+          </a:solidFill>
+          <a:ln>
+            <a:solidFill>
+              <a:srgbClr val="4472C4"/>
+            </a:solidFill>
+          </a:ln>
+        </p:spPr>
+        <p:style>
+          <a:lnRef idx="2">
+            <a:schemeClr val="accent1">
+              <a:shade val="15000"/>
+            </a:schemeClr>
+          </a:lnRef>
+          <a:fillRef idx="1">
+            <a:schemeClr val="accent1"/>
+          </a:fillRef>
+          <a:effectRef idx="0">
+            <a:schemeClr val="accent1"/>
+          </a:effectRef>
+          <a:fontRef idx="minor">
+            <a:schemeClr val="lt1"/>
+          </a:fontRef>
+        </p:style>
+        <p:txBody>
+          <a:bodyPr rtlCol="0" anchor="b"/>
+          <a:lstStyle/>
+          <a:p>
+            <a:pPr algn="ctr">
+              <a:spcBef>
+                <a:spcPts val="3000"/>
+              </a:spcBef>
+            </a:pPr>
+            <a:r>
+              <a:rPr lang="de-DE">
+                <a:solidFill>
+                  <a:srgbClr val="000000"/>
+                </a:solidFill>
+              </a:rPr>
+              <a:t>First</a:t>
+            </a:r>
+          </a:p>
+          <a:p>
+            <a:pPr algn="ctr">
+              <a:spcAft>
+                <a:spcPts val="3000"/>
+              </a:spcAft>
+            </a:pPr>
+            <a:r>
+              <a:rPr lang="de-DE">
+                <a:solidFill>
+                  <a:srgbClr val="000000"/>
+                </a:solidFill>
+              </a:rPr>
+              <a:t>Second</a:t>
+            </a:r>
+          </a:p>
+        </p:txBody>
+      </p:sp>
+    </p:spTree>
+    <p:extLst>
+      <p:ext uri="{BB962C8B-B14F-4D97-AF65-F5344CB8AC3E}">
+        <p14:creationId xmlns:p14="http://schemas.microsoft.com/office/powerpoint/2010/main" val="1605635974"/>
       </p:ext>
     </p:extLst>
   </p:cSld>

--- a/tests/corpus/pptx/generated/text-body.pptx
+++ b/tests/corpus/pptx/generated/text-body.pptx
@@ -11,6 +11,7 @@
     <p:sldId id="259" r:id="rId5"/>
     <p:sldId id="260" r:id="rId6"/>
     <p:sldId id="261" r:id="rId7"/>
+    <p:sldId id="262" r:id="rId8"/>
   </p:sldIdLst>
   <p:sldSz cx="12192000" cy="6858000"/>
   <p:notesSz cx="6858000" cy="9144000"/>
@@ -134,7 +135,7 @@
           <p:cNvPr id="2" name="Titel 1">
             <a:extLst>
               <a:ext uri="{FF2B5EF4-FFF2-40B4-BE49-F238E27FC236}">
-                <a16:creationId xmlns:a16="http://schemas.microsoft.com/office/drawing/2014/main" id="{FA821720-23FF-F1A2-A9EE-2445F1220A12}"/>
+                <a16:creationId xmlns:a16="http://schemas.microsoft.com/office/drawing/2014/main" id="{A8FB10D3-9EBE-8A9A-3501-96B639F2730E}"/>
               </a:ext>
             </a:extLst>
           </p:cNvPr>
@@ -171,7 +172,7 @@
           <p:cNvPr id="3" name="Untertitel 2">
             <a:extLst>
               <a:ext uri="{FF2B5EF4-FFF2-40B4-BE49-F238E27FC236}">
-                <a16:creationId xmlns:a16="http://schemas.microsoft.com/office/drawing/2014/main" id="{F9F5B542-1B18-BD8E-5966-037EE1B8619F}"/>
+                <a16:creationId xmlns:a16="http://schemas.microsoft.com/office/drawing/2014/main" id="{F642620E-3D4D-0FEF-BEA5-0E1217440B6B}"/>
               </a:ext>
             </a:extLst>
           </p:cNvPr>
@@ -241,7 +242,7 @@
           <p:cNvPr id="4" name="Datumsplatzhalter 3">
             <a:extLst>
               <a:ext uri="{FF2B5EF4-FFF2-40B4-BE49-F238E27FC236}">
-                <a16:creationId xmlns:a16="http://schemas.microsoft.com/office/drawing/2014/main" id="{C49C5D16-2C3E-F142-7276-7C52F65153D9}"/>
+                <a16:creationId xmlns:a16="http://schemas.microsoft.com/office/drawing/2014/main" id="{5EDC6C9A-5937-8C0C-7A94-235F604CDE09}"/>
               </a:ext>
             </a:extLst>
           </p:cNvPr>
@@ -257,7 +258,7 @@
           <a:bodyPr/>
           <a:lstStyle/>
           <a:p>
-            <a:fld id="{A7EAB04C-8910-4AD3-B609-D6829ABEC16F}" type="datetimeFigureOut">
+            <a:fld id="{4A9B9AD0-D4D9-4C2F-B6B6-248A9459F804}" type="datetimeFigureOut">
               <a:rPr lang="de-DE" smtClean="0"/>
               <a:t>08.10.2026</a:t>
             </a:fld>
@@ -270,7 +271,7 @@
           <p:cNvPr id="5" name="Fußzeilenplatzhalter 4">
             <a:extLst>
               <a:ext uri="{FF2B5EF4-FFF2-40B4-BE49-F238E27FC236}">
-                <a16:creationId xmlns:a16="http://schemas.microsoft.com/office/drawing/2014/main" id="{D63360CB-97A8-3867-59F6-C44288A7D2DA}"/>
+                <a16:creationId xmlns:a16="http://schemas.microsoft.com/office/drawing/2014/main" id="{7F948357-7981-F016-7E80-9D4194372A87}"/>
               </a:ext>
             </a:extLst>
           </p:cNvPr>
@@ -295,7 +296,7 @@
           <p:cNvPr id="6" name="Foliennummernplatzhalter 5">
             <a:extLst>
               <a:ext uri="{FF2B5EF4-FFF2-40B4-BE49-F238E27FC236}">
-                <a16:creationId xmlns:a16="http://schemas.microsoft.com/office/drawing/2014/main" id="{0B3CB250-D7EA-331D-F215-127FDF55C466}"/>
+                <a16:creationId xmlns:a16="http://schemas.microsoft.com/office/drawing/2014/main" id="{A799B476-9F8A-45BF-0637-BD47D82EE0A3}"/>
               </a:ext>
             </a:extLst>
           </p:cNvPr>
@@ -311,7 +312,7 @@
           <a:bodyPr/>
           <a:lstStyle/>
           <a:p>
-            <a:fld id="{8B055827-EE37-4425-A60A-F41882E0FFD2}" type="slidenum">
+            <a:fld id="{607F7310-B502-4DF7-B279-3C8C8F95364A}" type="slidenum">
               <a:rPr lang="de-DE" smtClean="0"/>
               <a:t>‹Nr.›</a:t>
             </a:fld>
@@ -322,7 +323,7 @@
     </p:spTree>
     <p:extLst>
       <p:ext uri="{BB962C8B-B14F-4D97-AF65-F5344CB8AC3E}">
-        <p14:creationId xmlns:p14="http://schemas.microsoft.com/office/powerpoint/2010/main" val="2385917343"/>
+        <p14:creationId xmlns:p14="http://schemas.microsoft.com/office/powerpoint/2010/main" val="2694986735"/>
       </p:ext>
     </p:extLst>
   </p:cSld>
@@ -354,7 +355,7 @@
           <p:cNvPr id="2" name="Titel 1">
             <a:extLst>
               <a:ext uri="{FF2B5EF4-FFF2-40B4-BE49-F238E27FC236}">
-                <a16:creationId xmlns:a16="http://schemas.microsoft.com/office/drawing/2014/main" id="{C8C1F964-65EC-1B1C-77B8-06F502AF9BA0}"/>
+                <a16:creationId xmlns:a16="http://schemas.microsoft.com/office/drawing/2014/main" id="{92DD8418-5104-5D26-8E86-86DDA4610D2C}"/>
               </a:ext>
             </a:extLst>
           </p:cNvPr>
@@ -382,7 +383,7 @@
           <p:cNvPr id="3" name="Vertikaler Textplatzhalter 2">
             <a:extLst>
               <a:ext uri="{FF2B5EF4-FFF2-40B4-BE49-F238E27FC236}">
-                <a16:creationId xmlns:a16="http://schemas.microsoft.com/office/drawing/2014/main" id="{4084B388-AB7E-161A-424C-4C7558BA764B}"/>
+                <a16:creationId xmlns:a16="http://schemas.microsoft.com/office/drawing/2014/main" id="{7FD70C7C-7AE4-A4F9-4ED7-9881C6D82E84}"/>
               </a:ext>
             </a:extLst>
           </p:cNvPr>
@@ -439,7 +440,7 @@
           <p:cNvPr id="4" name="Datumsplatzhalter 3">
             <a:extLst>
               <a:ext uri="{FF2B5EF4-FFF2-40B4-BE49-F238E27FC236}">
-                <a16:creationId xmlns:a16="http://schemas.microsoft.com/office/drawing/2014/main" id="{BBB25775-4AEC-3612-45C8-7130E6E60A9E}"/>
+                <a16:creationId xmlns:a16="http://schemas.microsoft.com/office/drawing/2014/main" id="{201416A8-B2BE-FEBE-B8BB-0E227B6E9334}"/>
               </a:ext>
             </a:extLst>
           </p:cNvPr>
@@ -455,7 +456,7 @@
           <a:bodyPr/>
           <a:lstStyle/>
           <a:p>
-            <a:fld id="{A7EAB04C-8910-4AD3-B609-D6829ABEC16F}" type="datetimeFigureOut">
+            <a:fld id="{4A9B9AD0-D4D9-4C2F-B6B6-248A9459F804}" type="datetimeFigureOut">
               <a:rPr lang="de-DE" smtClean="0"/>
               <a:t>08.10.2026</a:t>
             </a:fld>
@@ -468,7 +469,7 @@
           <p:cNvPr id="5" name="Fußzeilenplatzhalter 4">
             <a:extLst>
               <a:ext uri="{FF2B5EF4-FFF2-40B4-BE49-F238E27FC236}">
-                <a16:creationId xmlns:a16="http://schemas.microsoft.com/office/drawing/2014/main" id="{01D7C04D-5ED6-4720-20DC-4C6C71A60AAD}"/>
+                <a16:creationId xmlns:a16="http://schemas.microsoft.com/office/drawing/2014/main" id="{05024325-CACB-CD21-8E80-AA02704DC9D6}"/>
               </a:ext>
             </a:extLst>
           </p:cNvPr>
@@ -493,7 +494,7 @@
           <p:cNvPr id="6" name="Foliennummernplatzhalter 5">
             <a:extLst>
               <a:ext uri="{FF2B5EF4-FFF2-40B4-BE49-F238E27FC236}">
-                <a16:creationId xmlns:a16="http://schemas.microsoft.com/office/drawing/2014/main" id="{8A22CA77-44D4-C2A9-72B9-4CDCCF9C1EAC}"/>
+                <a16:creationId xmlns:a16="http://schemas.microsoft.com/office/drawing/2014/main" id="{53D54925-2249-F0F8-9E7D-91FDC4B6B877}"/>
               </a:ext>
             </a:extLst>
           </p:cNvPr>
@@ -509,7 +510,7 @@
           <a:bodyPr/>
           <a:lstStyle/>
           <a:p>
-            <a:fld id="{8B055827-EE37-4425-A60A-F41882E0FFD2}" type="slidenum">
+            <a:fld id="{607F7310-B502-4DF7-B279-3C8C8F95364A}" type="slidenum">
               <a:rPr lang="de-DE" smtClean="0"/>
               <a:t>‹Nr.›</a:t>
             </a:fld>
@@ -520,7 +521,7 @@
     </p:spTree>
     <p:extLst>
       <p:ext uri="{BB962C8B-B14F-4D97-AF65-F5344CB8AC3E}">
-        <p14:creationId xmlns:p14="http://schemas.microsoft.com/office/powerpoint/2010/main" val="1459088958"/>
+        <p14:creationId xmlns:p14="http://schemas.microsoft.com/office/powerpoint/2010/main" val="2507054523"/>
       </p:ext>
     </p:extLst>
   </p:cSld>
@@ -552,7 +553,7 @@
           <p:cNvPr id="2" name="Vertikaler Titel 1">
             <a:extLst>
               <a:ext uri="{FF2B5EF4-FFF2-40B4-BE49-F238E27FC236}">
-                <a16:creationId xmlns:a16="http://schemas.microsoft.com/office/drawing/2014/main" id="{96D981A3-C386-F294-DCC6-8D4899029B4C}"/>
+                <a16:creationId xmlns:a16="http://schemas.microsoft.com/office/drawing/2014/main" id="{ED71E2EA-3090-36BD-74DE-8E0AF2642DCC}"/>
               </a:ext>
             </a:extLst>
           </p:cNvPr>
@@ -585,7 +586,7 @@
           <p:cNvPr id="3" name="Vertikaler Textplatzhalter 2">
             <a:extLst>
               <a:ext uri="{FF2B5EF4-FFF2-40B4-BE49-F238E27FC236}">
-                <a16:creationId xmlns:a16="http://schemas.microsoft.com/office/drawing/2014/main" id="{F2F26B6A-9F4A-1FE4-57C7-C42638E4AA6F}"/>
+                <a16:creationId xmlns:a16="http://schemas.microsoft.com/office/drawing/2014/main" id="{201A259D-6934-72DB-8923-BDDF95A57F06}"/>
               </a:ext>
             </a:extLst>
           </p:cNvPr>
@@ -647,7 +648,7 @@
           <p:cNvPr id="4" name="Datumsplatzhalter 3">
             <a:extLst>
               <a:ext uri="{FF2B5EF4-FFF2-40B4-BE49-F238E27FC236}">
-                <a16:creationId xmlns:a16="http://schemas.microsoft.com/office/drawing/2014/main" id="{EFC37422-DB3F-9B78-39C2-A60EFE84715B}"/>
+                <a16:creationId xmlns:a16="http://schemas.microsoft.com/office/drawing/2014/main" id="{D7A91C4B-76A6-6247-CD77-F5523D592A6A}"/>
               </a:ext>
             </a:extLst>
           </p:cNvPr>
@@ -663,7 +664,7 @@
           <a:bodyPr/>
           <a:lstStyle/>
           <a:p>
-            <a:fld id="{A7EAB04C-8910-4AD3-B609-D6829ABEC16F}" type="datetimeFigureOut">
+            <a:fld id="{4A9B9AD0-D4D9-4C2F-B6B6-248A9459F804}" type="datetimeFigureOut">
               <a:rPr lang="de-DE" smtClean="0"/>
               <a:t>08.10.2026</a:t>
             </a:fld>
@@ -676,7 +677,7 @@
           <p:cNvPr id="5" name="Fußzeilenplatzhalter 4">
             <a:extLst>
               <a:ext uri="{FF2B5EF4-FFF2-40B4-BE49-F238E27FC236}">
-                <a16:creationId xmlns:a16="http://schemas.microsoft.com/office/drawing/2014/main" id="{514F3A84-C297-97C0-EC1E-D1A4148FF4A5}"/>
+                <a16:creationId xmlns:a16="http://schemas.microsoft.com/office/drawing/2014/main" id="{D321DD17-B274-239F-0427-F523D3B43AEB}"/>
               </a:ext>
             </a:extLst>
           </p:cNvPr>
@@ -701,7 +702,7 @@
           <p:cNvPr id="6" name="Foliennummernplatzhalter 5">
             <a:extLst>
               <a:ext uri="{FF2B5EF4-FFF2-40B4-BE49-F238E27FC236}">
-                <a16:creationId xmlns:a16="http://schemas.microsoft.com/office/drawing/2014/main" id="{8CA02A38-7B28-1D7F-47F6-9897916C7289}"/>
+                <a16:creationId xmlns:a16="http://schemas.microsoft.com/office/drawing/2014/main" id="{B70BD69A-1919-27F6-76B6-5DEBE4AFABCD}"/>
               </a:ext>
             </a:extLst>
           </p:cNvPr>
@@ -717,7 +718,7 @@
           <a:bodyPr/>
           <a:lstStyle/>
           <a:p>
-            <a:fld id="{8B055827-EE37-4425-A60A-F41882E0FFD2}" type="slidenum">
+            <a:fld id="{607F7310-B502-4DF7-B279-3C8C8F95364A}" type="slidenum">
               <a:rPr lang="de-DE" smtClean="0"/>
               <a:t>‹Nr.›</a:t>
             </a:fld>
@@ -728,7 +729,7 @@
     </p:spTree>
     <p:extLst>
       <p:ext uri="{BB962C8B-B14F-4D97-AF65-F5344CB8AC3E}">
-        <p14:creationId xmlns:p14="http://schemas.microsoft.com/office/powerpoint/2010/main" val="3664031727"/>
+        <p14:creationId xmlns:p14="http://schemas.microsoft.com/office/powerpoint/2010/main" val="4194091795"/>
       </p:ext>
     </p:extLst>
   </p:cSld>
@@ -760,7 +761,7 @@
           <p:cNvPr id="2" name="Titel 1">
             <a:extLst>
               <a:ext uri="{FF2B5EF4-FFF2-40B4-BE49-F238E27FC236}">
-                <a16:creationId xmlns:a16="http://schemas.microsoft.com/office/drawing/2014/main" id="{E041EFAD-1CE4-F504-A1D1-FD7F36A252EB}"/>
+                <a16:creationId xmlns:a16="http://schemas.microsoft.com/office/drawing/2014/main" id="{96D1C2EA-F066-7FA5-B6AB-5ABE3C99B4C6}"/>
               </a:ext>
             </a:extLst>
           </p:cNvPr>
@@ -788,7 +789,7 @@
           <p:cNvPr id="3" name="Inhaltsplatzhalter 2">
             <a:extLst>
               <a:ext uri="{FF2B5EF4-FFF2-40B4-BE49-F238E27FC236}">
-                <a16:creationId xmlns:a16="http://schemas.microsoft.com/office/drawing/2014/main" id="{12D5146D-E51F-0D98-58F9-4CE578039572}"/>
+                <a16:creationId xmlns:a16="http://schemas.microsoft.com/office/drawing/2014/main" id="{8FFEE096-580D-88C4-18A3-F74055E2E315}"/>
               </a:ext>
             </a:extLst>
           </p:cNvPr>
@@ -845,7 +846,7 @@
           <p:cNvPr id="4" name="Datumsplatzhalter 3">
             <a:extLst>
               <a:ext uri="{FF2B5EF4-FFF2-40B4-BE49-F238E27FC236}">
-                <a16:creationId xmlns:a16="http://schemas.microsoft.com/office/drawing/2014/main" id="{0C1FA08E-9CE5-303A-CF36-89119BD4D102}"/>
+                <a16:creationId xmlns:a16="http://schemas.microsoft.com/office/drawing/2014/main" id="{7B074C53-A653-4745-6AD2-FC744F0824AA}"/>
               </a:ext>
             </a:extLst>
           </p:cNvPr>
@@ -861,7 +862,7 @@
           <a:bodyPr/>
           <a:lstStyle/>
           <a:p>
-            <a:fld id="{A7EAB04C-8910-4AD3-B609-D6829ABEC16F}" type="datetimeFigureOut">
+            <a:fld id="{4A9B9AD0-D4D9-4C2F-B6B6-248A9459F804}" type="datetimeFigureOut">
               <a:rPr lang="de-DE" smtClean="0"/>
               <a:t>08.10.2026</a:t>
             </a:fld>
@@ -874,7 +875,7 @@
           <p:cNvPr id="5" name="Fußzeilenplatzhalter 4">
             <a:extLst>
               <a:ext uri="{FF2B5EF4-FFF2-40B4-BE49-F238E27FC236}">
-                <a16:creationId xmlns:a16="http://schemas.microsoft.com/office/drawing/2014/main" id="{1E47A044-E7AC-C898-C0C0-BE01FBC68A15}"/>
+                <a16:creationId xmlns:a16="http://schemas.microsoft.com/office/drawing/2014/main" id="{DB0FAB93-D575-F045-2DF4-7BC197260300}"/>
               </a:ext>
             </a:extLst>
           </p:cNvPr>
@@ -899,7 +900,7 @@
           <p:cNvPr id="6" name="Foliennummernplatzhalter 5">
             <a:extLst>
               <a:ext uri="{FF2B5EF4-FFF2-40B4-BE49-F238E27FC236}">
-                <a16:creationId xmlns:a16="http://schemas.microsoft.com/office/drawing/2014/main" id="{C5944E25-48A3-A70E-005C-7767A01D885D}"/>
+                <a16:creationId xmlns:a16="http://schemas.microsoft.com/office/drawing/2014/main" id="{5FDAC22A-97DB-1D8D-E563-757D6F9DAE42}"/>
               </a:ext>
             </a:extLst>
           </p:cNvPr>
@@ -915,7 +916,7 @@
           <a:bodyPr/>
           <a:lstStyle/>
           <a:p>
-            <a:fld id="{8B055827-EE37-4425-A60A-F41882E0FFD2}" type="slidenum">
+            <a:fld id="{607F7310-B502-4DF7-B279-3C8C8F95364A}" type="slidenum">
               <a:rPr lang="de-DE" smtClean="0"/>
               <a:t>‹Nr.›</a:t>
             </a:fld>
@@ -926,7 +927,7 @@
     </p:spTree>
     <p:extLst>
       <p:ext uri="{BB962C8B-B14F-4D97-AF65-F5344CB8AC3E}">
-        <p14:creationId xmlns:p14="http://schemas.microsoft.com/office/powerpoint/2010/main" val="2848500552"/>
+        <p14:creationId xmlns:p14="http://schemas.microsoft.com/office/powerpoint/2010/main" val="26735239"/>
       </p:ext>
     </p:extLst>
   </p:cSld>
@@ -958,7 +959,7 @@
           <p:cNvPr id="2" name="Titel 1">
             <a:extLst>
               <a:ext uri="{FF2B5EF4-FFF2-40B4-BE49-F238E27FC236}">
-                <a16:creationId xmlns:a16="http://schemas.microsoft.com/office/drawing/2014/main" id="{25B2F426-8A40-A73A-A5C9-8CAAF339F5E0}"/>
+                <a16:creationId xmlns:a16="http://schemas.microsoft.com/office/drawing/2014/main" id="{B304DA51-1BCF-C679-9194-403BE1AFC67A}"/>
               </a:ext>
             </a:extLst>
           </p:cNvPr>
@@ -995,7 +996,7 @@
           <p:cNvPr id="3" name="Textplatzhalter 2">
             <a:extLst>
               <a:ext uri="{FF2B5EF4-FFF2-40B4-BE49-F238E27FC236}">
-                <a16:creationId xmlns:a16="http://schemas.microsoft.com/office/drawing/2014/main" id="{FD2F5CCF-41C6-43F2-C86F-F5F414793174}"/>
+                <a16:creationId xmlns:a16="http://schemas.microsoft.com/office/drawing/2014/main" id="{652D54B0-8320-C06D-BDD7-2F94ECEBCD23}"/>
               </a:ext>
             </a:extLst>
           </p:cNvPr>
@@ -1120,7 +1121,7 @@
           <p:cNvPr id="4" name="Datumsplatzhalter 3">
             <a:extLst>
               <a:ext uri="{FF2B5EF4-FFF2-40B4-BE49-F238E27FC236}">
-                <a16:creationId xmlns:a16="http://schemas.microsoft.com/office/drawing/2014/main" id="{E3FE8952-99D6-9A4E-5AC5-2B79029747FC}"/>
+                <a16:creationId xmlns:a16="http://schemas.microsoft.com/office/drawing/2014/main" id="{4283A8E8-DE27-088A-0BB1-E1A81C2B1168}"/>
               </a:ext>
             </a:extLst>
           </p:cNvPr>
@@ -1136,7 +1137,7 @@
           <a:bodyPr/>
           <a:lstStyle/>
           <a:p>
-            <a:fld id="{A7EAB04C-8910-4AD3-B609-D6829ABEC16F}" type="datetimeFigureOut">
+            <a:fld id="{4A9B9AD0-D4D9-4C2F-B6B6-248A9459F804}" type="datetimeFigureOut">
               <a:rPr lang="de-DE" smtClean="0"/>
               <a:t>08.10.2026</a:t>
             </a:fld>
@@ -1149,7 +1150,7 @@
           <p:cNvPr id="5" name="Fußzeilenplatzhalter 4">
             <a:extLst>
               <a:ext uri="{FF2B5EF4-FFF2-40B4-BE49-F238E27FC236}">
-                <a16:creationId xmlns:a16="http://schemas.microsoft.com/office/drawing/2014/main" id="{2C896470-B5C1-8F8A-BABA-4A79F298A4CC}"/>
+                <a16:creationId xmlns:a16="http://schemas.microsoft.com/office/drawing/2014/main" id="{B987FBC9-913B-65D9-C5F5-0D66060798E6}"/>
               </a:ext>
             </a:extLst>
           </p:cNvPr>
@@ -1174,7 +1175,7 @@
           <p:cNvPr id="6" name="Foliennummernplatzhalter 5">
             <a:extLst>
               <a:ext uri="{FF2B5EF4-FFF2-40B4-BE49-F238E27FC236}">
-                <a16:creationId xmlns:a16="http://schemas.microsoft.com/office/drawing/2014/main" id="{DB1F3564-7966-8E56-485D-AB94E2237758}"/>
+                <a16:creationId xmlns:a16="http://schemas.microsoft.com/office/drawing/2014/main" id="{316CA367-F4F8-37E4-B3D4-C4B62AC3EFE7}"/>
               </a:ext>
             </a:extLst>
           </p:cNvPr>
@@ -1190,7 +1191,7 @@
           <a:bodyPr/>
           <a:lstStyle/>
           <a:p>
-            <a:fld id="{8B055827-EE37-4425-A60A-F41882E0FFD2}" type="slidenum">
+            <a:fld id="{607F7310-B502-4DF7-B279-3C8C8F95364A}" type="slidenum">
               <a:rPr lang="de-DE" smtClean="0"/>
               <a:t>‹Nr.›</a:t>
             </a:fld>
@@ -1201,7 +1202,7 @@
     </p:spTree>
     <p:extLst>
       <p:ext uri="{BB962C8B-B14F-4D97-AF65-F5344CB8AC3E}">
-        <p14:creationId xmlns:p14="http://schemas.microsoft.com/office/powerpoint/2010/main" val="175642502"/>
+        <p14:creationId xmlns:p14="http://schemas.microsoft.com/office/powerpoint/2010/main" val="2788758552"/>
       </p:ext>
     </p:extLst>
   </p:cSld>
@@ -1233,7 +1234,7 @@
           <p:cNvPr id="2" name="Titel 1">
             <a:extLst>
               <a:ext uri="{FF2B5EF4-FFF2-40B4-BE49-F238E27FC236}">
-                <a16:creationId xmlns:a16="http://schemas.microsoft.com/office/drawing/2014/main" id="{00EB414B-ADDB-07E2-31D8-8C05CEC06ACB}"/>
+                <a16:creationId xmlns:a16="http://schemas.microsoft.com/office/drawing/2014/main" id="{1D0ECA5C-FEC1-B8A7-6F0C-224CC39F23CA}"/>
               </a:ext>
             </a:extLst>
           </p:cNvPr>
@@ -1261,7 +1262,7 @@
           <p:cNvPr id="3" name="Inhaltsplatzhalter 2">
             <a:extLst>
               <a:ext uri="{FF2B5EF4-FFF2-40B4-BE49-F238E27FC236}">
-                <a16:creationId xmlns:a16="http://schemas.microsoft.com/office/drawing/2014/main" id="{2D334A9E-975D-AAF4-6D87-2817131D7ACF}"/>
+                <a16:creationId xmlns:a16="http://schemas.microsoft.com/office/drawing/2014/main" id="{602A4F95-D51B-EAA1-DCE8-4F66521FE752}"/>
               </a:ext>
             </a:extLst>
           </p:cNvPr>
@@ -1323,7 +1324,7 @@
           <p:cNvPr id="4" name="Inhaltsplatzhalter 3">
             <a:extLst>
               <a:ext uri="{FF2B5EF4-FFF2-40B4-BE49-F238E27FC236}">
-                <a16:creationId xmlns:a16="http://schemas.microsoft.com/office/drawing/2014/main" id="{1722891E-CD05-AF90-60EC-906DDFD0C11C}"/>
+                <a16:creationId xmlns:a16="http://schemas.microsoft.com/office/drawing/2014/main" id="{5BD145B0-0688-1B4A-A027-493FC68CDD95}"/>
               </a:ext>
             </a:extLst>
           </p:cNvPr>
@@ -1385,7 +1386,7 @@
           <p:cNvPr id="5" name="Datumsplatzhalter 4">
             <a:extLst>
               <a:ext uri="{FF2B5EF4-FFF2-40B4-BE49-F238E27FC236}">
-                <a16:creationId xmlns:a16="http://schemas.microsoft.com/office/drawing/2014/main" id="{789A06D0-4F55-B7D7-955A-FCFBB566D553}"/>
+                <a16:creationId xmlns:a16="http://schemas.microsoft.com/office/drawing/2014/main" id="{FD4E1696-E4CA-2AA1-7835-4B825739D018}"/>
               </a:ext>
             </a:extLst>
           </p:cNvPr>
@@ -1401,7 +1402,7 @@
           <a:bodyPr/>
           <a:lstStyle/>
           <a:p>
-            <a:fld id="{A7EAB04C-8910-4AD3-B609-D6829ABEC16F}" type="datetimeFigureOut">
+            <a:fld id="{4A9B9AD0-D4D9-4C2F-B6B6-248A9459F804}" type="datetimeFigureOut">
               <a:rPr lang="de-DE" smtClean="0"/>
               <a:t>08.10.2026</a:t>
             </a:fld>
@@ -1414,7 +1415,7 @@
           <p:cNvPr id="6" name="Fußzeilenplatzhalter 5">
             <a:extLst>
               <a:ext uri="{FF2B5EF4-FFF2-40B4-BE49-F238E27FC236}">
-                <a16:creationId xmlns:a16="http://schemas.microsoft.com/office/drawing/2014/main" id="{B241AB92-7052-232F-B588-900E2824FEA4}"/>
+                <a16:creationId xmlns:a16="http://schemas.microsoft.com/office/drawing/2014/main" id="{44488409-1793-D459-27BA-BA653E1AE861}"/>
               </a:ext>
             </a:extLst>
           </p:cNvPr>
@@ -1439,7 +1440,7 @@
           <p:cNvPr id="7" name="Foliennummernplatzhalter 6">
             <a:extLst>
               <a:ext uri="{FF2B5EF4-FFF2-40B4-BE49-F238E27FC236}">
-                <a16:creationId xmlns:a16="http://schemas.microsoft.com/office/drawing/2014/main" id="{6F9DFDAD-E97F-6A8D-E6CE-3AC31D72D734}"/>
+                <a16:creationId xmlns:a16="http://schemas.microsoft.com/office/drawing/2014/main" id="{040C034A-71AC-E0B3-B0B9-CB6FF258D93F}"/>
               </a:ext>
             </a:extLst>
           </p:cNvPr>
@@ -1455,7 +1456,7 @@
           <a:bodyPr/>
           <a:lstStyle/>
           <a:p>
-            <a:fld id="{8B055827-EE37-4425-A60A-F41882E0FFD2}" type="slidenum">
+            <a:fld id="{607F7310-B502-4DF7-B279-3C8C8F95364A}" type="slidenum">
               <a:rPr lang="de-DE" smtClean="0"/>
               <a:t>‹Nr.›</a:t>
             </a:fld>
@@ -1466,7 +1467,7 @@
     </p:spTree>
     <p:extLst>
       <p:ext uri="{BB962C8B-B14F-4D97-AF65-F5344CB8AC3E}">
-        <p14:creationId xmlns:p14="http://schemas.microsoft.com/office/powerpoint/2010/main" val="2060770139"/>
+        <p14:creationId xmlns:p14="http://schemas.microsoft.com/office/powerpoint/2010/main" val="1570186891"/>
       </p:ext>
     </p:extLst>
   </p:cSld>
@@ -1498,7 +1499,7 @@
           <p:cNvPr id="2" name="Titel 1">
             <a:extLst>
               <a:ext uri="{FF2B5EF4-FFF2-40B4-BE49-F238E27FC236}">
-                <a16:creationId xmlns:a16="http://schemas.microsoft.com/office/drawing/2014/main" id="{B99E7F31-67E6-8961-32DB-91BA3DBCFAAD}"/>
+                <a16:creationId xmlns:a16="http://schemas.microsoft.com/office/drawing/2014/main" id="{9EEEE1BC-053F-53AD-7AC3-08F387F48846}"/>
               </a:ext>
             </a:extLst>
           </p:cNvPr>
@@ -1531,7 +1532,7 @@
           <p:cNvPr id="3" name="Textplatzhalter 2">
             <a:extLst>
               <a:ext uri="{FF2B5EF4-FFF2-40B4-BE49-F238E27FC236}">
-                <a16:creationId xmlns:a16="http://schemas.microsoft.com/office/drawing/2014/main" id="{66251215-6526-1152-00D0-34E2D24C6D08}"/>
+                <a16:creationId xmlns:a16="http://schemas.microsoft.com/office/drawing/2014/main" id="{46818593-9635-C1EE-A325-9C11DD79E743}"/>
               </a:ext>
             </a:extLst>
           </p:cNvPr>
@@ -1602,7 +1603,7 @@
           <p:cNvPr id="4" name="Inhaltsplatzhalter 3">
             <a:extLst>
               <a:ext uri="{FF2B5EF4-FFF2-40B4-BE49-F238E27FC236}">
-                <a16:creationId xmlns:a16="http://schemas.microsoft.com/office/drawing/2014/main" id="{D6E33BE4-7461-6A40-6674-CCA4908BB42F}"/>
+                <a16:creationId xmlns:a16="http://schemas.microsoft.com/office/drawing/2014/main" id="{584E6262-2776-56B3-E8E6-E718E4902261}"/>
               </a:ext>
             </a:extLst>
           </p:cNvPr>
@@ -1664,7 +1665,7 @@
           <p:cNvPr id="5" name="Textplatzhalter 4">
             <a:extLst>
               <a:ext uri="{FF2B5EF4-FFF2-40B4-BE49-F238E27FC236}">
-                <a16:creationId xmlns:a16="http://schemas.microsoft.com/office/drawing/2014/main" id="{F38B87CA-B268-0A5D-869B-412A16C5D160}"/>
+                <a16:creationId xmlns:a16="http://schemas.microsoft.com/office/drawing/2014/main" id="{D6CA7E6A-8FFE-C3A2-AF13-D1EC3E913856}"/>
               </a:ext>
             </a:extLst>
           </p:cNvPr>
@@ -1735,7 +1736,7 @@
           <p:cNvPr id="6" name="Inhaltsplatzhalter 5">
             <a:extLst>
               <a:ext uri="{FF2B5EF4-FFF2-40B4-BE49-F238E27FC236}">
-                <a16:creationId xmlns:a16="http://schemas.microsoft.com/office/drawing/2014/main" id="{D8C612A6-1FBD-BC3D-7B09-2F7F73611E88}"/>
+                <a16:creationId xmlns:a16="http://schemas.microsoft.com/office/drawing/2014/main" id="{C34188BB-186F-4C2C-AB3F-55A1BDBDD37F}"/>
               </a:ext>
             </a:extLst>
           </p:cNvPr>
@@ -1797,7 +1798,7 @@
           <p:cNvPr id="7" name="Datumsplatzhalter 6">
             <a:extLst>
               <a:ext uri="{FF2B5EF4-FFF2-40B4-BE49-F238E27FC236}">
-                <a16:creationId xmlns:a16="http://schemas.microsoft.com/office/drawing/2014/main" id="{F83B0B9E-B777-48D6-B269-B03DD0091427}"/>
+                <a16:creationId xmlns:a16="http://schemas.microsoft.com/office/drawing/2014/main" id="{7695BBCA-E6F6-EBA9-30A4-A998516772DA}"/>
               </a:ext>
             </a:extLst>
           </p:cNvPr>
@@ -1813,7 +1814,7 @@
           <a:bodyPr/>
           <a:lstStyle/>
           <a:p>
-            <a:fld id="{A7EAB04C-8910-4AD3-B609-D6829ABEC16F}" type="datetimeFigureOut">
+            <a:fld id="{4A9B9AD0-D4D9-4C2F-B6B6-248A9459F804}" type="datetimeFigureOut">
               <a:rPr lang="de-DE" smtClean="0"/>
               <a:t>08.10.2026</a:t>
             </a:fld>
@@ -1826,7 +1827,7 @@
           <p:cNvPr id="8" name="Fußzeilenplatzhalter 7">
             <a:extLst>
               <a:ext uri="{FF2B5EF4-FFF2-40B4-BE49-F238E27FC236}">
-                <a16:creationId xmlns:a16="http://schemas.microsoft.com/office/drawing/2014/main" id="{E0E478CB-EBAF-6499-817D-7AC1390201C5}"/>
+                <a16:creationId xmlns:a16="http://schemas.microsoft.com/office/drawing/2014/main" id="{E4C25FA6-2CDE-7B85-1537-BD31970D7C40}"/>
               </a:ext>
             </a:extLst>
           </p:cNvPr>
@@ -1851,7 +1852,7 @@
           <p:cNvPr id="9" name="Foliennummernplatzhalter 8">
             <a:extLst>
               <a:ext uri="{FF2B5EF4-FFF2-40B4-BE49-F238E27FC236}">
-                <a16:creationId xmlns:a16="http://schemas.microsoft.com/office/drawing/2014/main" id="{2D52B08C-0A9B-825A-B119-DF02B9CFE4CD}"/>
+                <a16:creationId xmlns:a16="http://schemas.microsoft.com/office/drawing/2014/main" id="{E8979D30-4197-1E36-0490-8D8FAE6DAB65}"/>
               </a:ext>
             </a:extLst>
           </p:cNvPr>
@@ -1867,7 +1868,7 @@
           <a:bodyPr/>
           <a:lstStyle/>
           <a:p>
-            <a:fld id="{8B055827-EE37-4425-A60A-F41882E0FFD2}" type="slidenum">
+            <a:fld id="{607F7310-B502-4DF7-B279-3C8C8F95364A}" type="slidenum">
               <a:rPr lang="de-DE" smtClean="0"/>
               <a:t>‹Nr.›</a:t>
             </a:fld>
@@ -1878,7 +1879,7 @@
     </p:spTree>
     <p:extLst>
       <p:ext uri="{BB962C8B-B14F-4D97-AF65-F5344CB8AC3E}">
-        <p14:creationId xmlns:p14="http://schemas.microsoft.com/office/powerpoint/2010/main" val="4235222909"/>
+        <p14:creationId xmlns:p14="http://schemas.microsoft.com/office/powerpoint/2010/main" val="3499822781"/>
       </p:ext>
     </p:extLst>
   </p:cSld>
@@ -1910,7 +1911,7 @@
           <p:cNvPr id="2" name="Titel 1">
             <a:extLst>
               <a:ext uri="{FF2B5EF4-FFF2-40B4-BE49-F238E27FC236}">
-                <a16:creationId xmlns:a16="http://schemas.microsoft.com/office/drawing/2014/main" id="{6D6E67A3-FD21-E0A5-8EAA-B66AF28FF2A3}"/>
+                <a16:creationId xmlns:a16="http://schemas.microsoft.com/office/drawing/2014/main" id="{88218E5C-DC13-5E12-0E73-1700285C6D87}"/>
               </a:ext>
             </a:extLst>
           </p:cNvPr>
@@ -1938,7 +1939,7 @@
           <p:cNvPr id="3" name="Datumsplatzhalter 2">
             <a:extLst>
               <a:ext uri="{FF2B5EF4-FFF2-40B4-BE49-F238E27FC236}">
-                <a16:creationId xmlns:a16="http://schemas.microsoft.com/office/drawing/2014/main" id="{8DD3AD4B-266F-97D8-E7B2-E8FF8374BE8A}"/>
+                <a16:creationId xmlns:a16="http://schemas.microsoft.com/office/drawing/2014/main" id="{F6AF8899-5BA5-54EF-CC5E-7C2D57161F80}"/>
               </a:ext>
             </a:extLst>
           </p:cNvPr>
@@ -1954,7 +1955,7 @@
           <a:bodyPr/>
           <a:lstStyle/>
           <a:p>
-            <a:fld id="{A7EAB04C-8910-4AD3-B609-D6829ABEC16F}" type="datetimeFigureOut">
+            <a:fld id="{4A9B9AD0-D4D9-4C2F-B6B6-248A9459F804}" type="datetimeFigureOut">
               <a:rPr lang="de-DE" smtClean="0"/>
               <a:t>08.10.2026</a:t>
             </a:fld>
@@ -1967,7 +1968,7 @@
           <p:cNvPr id="4" name="Fußzeilenplatzhalter 3">
             <a:extLst>
               <a:ext uri="{FF2B5EF4-FFF2-40B4-BE49-F238E27FC236}">
-                <a16:creationId xmlns:a16="http://schemas.microsoft.com/office/drawing/2014/main" id="{61568192-6175-9D1B-B4F8-B522DB7759BD}"/>
+                <a16:creationId xmlns:a16="http://schemas.microsoft.com/office/drawing/2014/main" id="{1E2C656E-2810-D983-6831-A2CFEB53A8B7}"/>
               </a:ext>
             </a:extLst>
           </p:cNvPr>
@@ -1992,7 +1993,7 @@
           <p:cNvPr id="5" name="Foliennummernplatzhalter 4">
             <a:extLst>
               <a:ext uri="{FF2B5EF4-FFF2-40B4-BE49-F238E27FC236}">
-                <a16:creationId xmlns:a16="http://schemas.microsoft.com/office/drawing/2014/main" id="{7DFE6E33-A3ED-9195-A6E8-8B641AD8E89D}"/>
+                <a16:creationId xmlns:a16="http://schemas.microsoft.com/office/drawing/2014/main" id="{79D6F739-BF95-DBEF-3BBB-B66F5013BEC7}"/>
               </a:ext>
             </a:extLst>
           </p:cNvPr>
@@ -2008,7 +2009,7 @@
           <a:bodyPr/>
           <a:lstStyle/>
           <a:p>
-            <a:fld id="{8B055827-EE37-4425-A60A-F41882E0FFD2}" type="slidenum">
+            <a:fld id="{607F7310-B502-4DF7-B279-3C8C8F95364A}" type="slidenum">
               <a:rPr lang="de-DE" smtClean="0"/>
               <a:t>‹Nr.›</a:t>
             </a:fld>
@@ -2019,7 +2020,7 @@
     </p:spTree>
     <p:extLst>
       <p:ext uri="{BB962C8B-B14F-4D97-AF65-F5344CB8AC3E}">
-        <p14:creationId xmlns:p14="http://schemas.microsoft.com/office/powerpoint/2010/main" val="91855070"/>
+        <p14:creationId xmlns:p14="http://schemas.microsoft.com/office/powerpoint/2010/main" val="3040599971"/>
       </p:ext>
     </p:extLst>
   </p:cSld>
@@ -2051,7 +2052,7 @@
           <p:cNvPr id="2" name="Datumsplatzhalter 1">
             <a:extLst>
               <a:ext uri="{FF2B5EF4-FFF2-40B4-BE49-F238E27FC236}">
-                <a16:creationId xmlns:a16="http://schemas.microsoft.com/office/drawing/2014/main" id="{D75A3C3E-831A-CD92-2F20-791DFD5C7BE0}"/>
+                <a16:creationId xmlns:a16="http://schemas.microsoft.com/office/drawing/2014/main" id="{04666692-21A4-609D-E732-732BCD0F5965}"/>
               </a:ext>
             </a:extLst>
           </p:cNvPr>
@@ -2067,7 +2068,7 @@
           <a:bodyPr/>
           <a:lstStyle/>
           <a:p>
-            <a:fld id="{A7EAB04C-8910-4AD3-B609-D6829ABEC16F}" type="datetimeFigureOut">
+            <a:fld id="{4A9B9AD0-D4D9-4C2F-B6B6-248A9459F804}" type="datetimeFigureOut">
               <a:rPr lang="de-DE" smtClean="0"/>
               <a:t>08.10.2026</a:t>
             </a:fld>
@@ -2080,7 +2081,7 @@
           <p:cNvPr id="3" name="Fußzeilenplatzhalter 2">
             <a:extLst>
               <a:ext uri="{FF2B5EF4-FFF2-40B4-BE49-F238E27FC236}">
-                <a16:creationId xmlns:a16="http://schemas.microsoft.com/office/drawing/2014/main" id="{E15676A7-E59A-0929-48CD-83566D987A0C}"/>
+                <a16:creationId xmlns:a16="http://schemas.microsoft.com/office/drawing/2014/main" id="{27EC4E6D-017F-535F-9093-DCA45291C52F}"/>
               </a:ext>
             </a:extLst>
           </p:cNvPr>
@@ -2105,7 +2106,7 @@
           <p:cNvPr id="4" name="Foliennummernplatzhalter 3">
             <a:extLst>
               <a:ext uri="{FF2B5EF4-FFF2-40B4-BE49-F238E27FC236}">
-                <a16:creationId xmlns:a16="http://schemas.microsoft.com/office/drawing/2014/main" id="{4054E0BF-9DAB-8CF7-B7D3-E67F803D2B6A}"/>
+                <a16:creationId xmlns:a16="http://schemas.microsoft.com/office/drawing/2014/main" id="{42787B0B-2E9E-BE75-86E1-38C609F768D2}"/>
               </a:ext>
             </a:extLst>
           </p:cNvPr>
@@ -2121,7 +2122,7 @@
           <a:bodyPr/>
           <a:lstStyle/>
           <a:p>
-            <a:fld id="{8B055827-EE37-4425-A60A-F41882E0FFD2}" type="slidenum">
+            <a:fld id="{607F7310-B502-4DF7-B279-3C8C8F95364A}" type="slidenum">
               <a:rPr lang="de-DE" smtClean="0"/>
               <a:t>‹Nr.›</a:t>
             </a:fld>
@@ -2132,7 +2133,7 @@
     </p:spTree>
     <p:extLst>
       <p:ext uri="{BB962C8B-B14F-4D97-AF65-F5344CB8AC3E}">
-        <p14:creationId xmlns:p14="http://schemas.microsoft.com/office/powerpoint/2010/main" val="2498670751"/>
+        <p14:creationId xmlns:p14="http://schemas.microsoft.com/office/powerpoint/2010/main" val="2645288025"/>
       </p:ext>
     </p:extLst>
   </p:cSld>
@@ -2164,7 +2165,7 @@
           <p:cNvPr id="2" name="Titel 1">
             <a:extLst>
               <a:ext uri="{FF2B5EF4-FFF2-40B4-BE49-F238E27FC236}">
-                <a16:creationId xmlns:a16="http://schemas.microsoft.com/office/drawing/2014/main" id="{206651F4-2754-CB5C-50CB-F198809DE5C4}"/>
+                <a16:creationId xmlns:a16="http://schemas.microsoft.com/office/drawing/2014/main" id="{CB40F07D-98FE-B479-C3E6-DDA458D62F52}"/>
               </a:ext>
             </a:extLst>
           </p:cNvPr>
@@ -2201,7 +2202,7 @@
           <p:cNvPr id="3" name="Inhaltsplatzhalter 2">
             <a:extLst>
               <a:ext uri="{FF2B5EF4-FFF2-40B4-BE49-F238E27FC236}">
-                <a16:creationId xmlns:a16="http://schemas.microsoft.com/office/drawing/2014/main" id="{BCFDEA16-AE23-12C3-C5BE-1A3D204445C7}"/>
+                <a16:creationId xmlns:a16="http://schemas.microsoft.com/office/drawing/2014/main" id="{7045D4D6-745C-F52A-0A68-9D51059E3E3F}"/>
               </a:ext>
             </a:extLst>
           </p:cNvPr>
@@ -2291,7 +2292,7 @@
           <p:cNvPr id="4" name="Textplatzhalter 3">
             <a:extLst>
               <a:ext uri="{FF2B5EF4-FFF2-40B4-BE49-F238E27FC236}">
-                <a16:creationId xmlns:a16="http://schemas.microsoft.com/office/drawing/2014/main" id="{1162120C-C3CD-FE5D-74AA-1FAC4FF7C094}"/>
+                <a16:creationId xmlns:a16="http://schemas.microsoft.com/office/drawing/2014/main" id="{98BE0572-6948-B3D5-2372-5C12EB3E8F74}"/>
               </a:ext>
             </a:extLst>
           </p:cNvPr>
@@ -2362,7 +2363,7 @@
           <p:cNvPr id="5" name="Datumsplatzhalter 4">
             <a:extLst>
               <a:ext uri="{FF2B5EF4-FFF2-40B4-BE49-F238E27FC236}">
-                <a16:creationId xmlns:a16="http://schemas.microsoft.com/office/drawing/2014/main" id="{C05C85D5-B58A-AF50-364D-EE484BFF6379}"/>
+                <a16:creationId xmlns:a16="http://schemas.microsoft.com/office/drawing/2014/main" id="{163FEB67-747B-FD5F-B4B3-804FD436BE14}"/>
               </a:ext>
             </a:extLst>
           </p:cNvPr>
@@ -2378,7 +2379,7 @@
           <a:bodyPr/>
           <a:lstStyle/>
           <a:p>
-            <a:fld id="{A7EAB04C-8910-4AD3-B609-D6829ABEC16F}" type="datetimeFigureOut">
+            <a:fld id="{4A9B9AD0-D4D9-4C2F-B6B6-248A9459F804}" type="datetimeFigureOut">
               <a:rPr lang="de-DE" smtClean="0"/>
               <a:t>08.10.2026</a:t>
             </a:fld>
@@ -2391,7 +2392,7 @@
           <p:cNvPr id="6" name="Fußzeilenplatzhalter 5">
             <a:extLst>
               <a:ext uri="{FF2B5EF4-FFF2-40B4-BE49-F238E27FC236}">
-                <a16:creationId xmlns:a16="http://schemas.microsoft.com/office/drawing/2014/main" id="{E6246856-4046-D475-1996-DBF6766A408C}"/>
+                <a16:creationId xmlns:a16="http://schemas.microsoft.com/office/drawing/2014/main" id="{C2C8A365-0FB7-38F3-1500-3B592A1BB1CD}"/>
               </a:ext>
             </a:extLst>
           </p:cNvPr>
@@ -2416,7 +2417,7 @@
           <p:cNvPr id="7" name="Foliennummernplatzhalter 6">
             <a:extLst>
               <a:ext uri="{FF2B5EF4-FFF2-40B4-BE49-F238E27FC236}">
-                <a16:creationId xmlns:a16="http://schemas.microsoft.com/office/drawing/2014/main" id="{C2C6F68F-C560-0156-7EBF-A90FD1D8B95C}"/>
+                <a16:creationId xmlns:a16="http://schemas.microsoft.com/office/drawing/2014/main" id="{F1C7A15F-4697-52F7-28A1-5F6650E3BC39}"/>
               </a:ext>
             </a:extLst>
           </p:cNvPr>
@@ -2432,7 +2433,7 @@
           <a:bodyPr/>
           <a:lstStyle/>
           <a:p>
-            <a:fld id="{8B055827-EE37-4425-A60A-F41882E0FFD2}" type="slidenum">
+            <a:fld id="{607F7310-B502-4DF7-B279-3C8C8F95364A}" type="slidenum">
               <a:rPr lang="de-DE" smtClean="0"/>
               <a:t>‹Nr.›</a:t>
             </a:fld>
@@ -2443,7 +2444,7 @@
     </p:spTree>
     <p:extLst>
       <p:ext uri="{BB962C8B-B14F-4D97-AF65-F5344CB8AC3E}">
-        <p14:creationId xmlns:p14="http://schemas.microsoft.com/office/powerpoint/2010/main" val="3770993461"/>
+        <p14:creationId xmlns:p14="http://schemas.microsoft.com/office/powerpoint/2010/main" val="3228265496"/>
       </p:ext>
     </p:extLst>
   </p:cSld>
@@ -2475,7 +2476,7 @@
           <p:cNvPr id="2" name="Titel 1">
             <a:extLst>
               <a:ext uri="{FF2B5EF4-FFF2-40B4-BE49-F238E27FC236}">
-                <a16:creationId xmlns:a16="http://schemas.microsoft.com/office/drawing/2014/main" id="{93B47601-028F-654A-3BA7-53B6EF9B2801}"/>
+                <a16:creationId xmlns:a16="http://schemas.microsoft.com/office/drawing/2014/main" id="{0F8DCCE4-3E86-E460-FBA1-413A1676D903}"/>
               </a:ext>
             </a:extLst>
           </p:cNvPr>
@@ -2512,7 +2513,7 @@
           <p:cNvPr id="3" name="Bildplatzhalter 2">
             <a:extLst>
               <a:ext uri="{FF2B5EF4-FFF2-40B4-BE49-F238E27FC236}">
-                <a16:creationId xmlns:a16="http://schemas.microsoft.com/office/drawing/2014/main" id="{5E9E254A-E658-0C42-F010-DC3A3CAE96D9}"/>
+                <a16:creationId xmlns:a16="http://schemas.microsoft.com/office/drawing/2014/main" id="{FAF646BF-E8CB-8918-41FE-8967F60F7E84}"/>
               </a:ext>
             </a:extLst>
           </p:cNvPr>
@@ -2579,7 +2580,7 @@
           <p:cNvPr id="4" name="Textplatzhalter 3">
             <a:extLst>
               <a:ext uri="{FF2B5EF4-FFF2-40B4-BE49-F238E27FC236}">
-                <a16:creationId xmlns:a16="http://schemas.microsoft.com/office/drawing/2014/main" id="{11A7C49D-EA10-9E31-8735-5E2B03EFEC35}"/>
+                <a16:creationId xmlns:a16="http://schemas.microsoft.com/office/drawing/2014/main" id="{EDA6A756-D5F5-5A75-740B-A1BBF2593E5B}"/>
               </a:ext>
             </a:extLst>
           </p:cNvPr>
@@ -2650,7 +2651,7 @@
           <p:cNvPr id="5" name="Datumsplatzhalter 4">
             <a:extLst>
               <a:ext uri="{FF2B5EF4-FFF2-40B4-BE49-F238E27FC236}">
-                <a16:creationId xmlns:a16="http://schemas.microsoft.com/office/drawing/2014/main" id="{E84EEF85-B79C-B8CC-EBA8-8325A8353E10}"/>
+                <a16:creationId xmlns:a16="http://schemas.microsoft.com/office/drawing/2014/main" id="{3BE75C73-8325-2A63-E2AD-25C49963BB02}"/>
               </a:ext>
             </a:extLst>
           </p:cNvPr>
@@ -2666,7 +2667,7 @@
           <a:bodyPr/>
           <a:lstStyle/>
           <a:p>
-            <a:fld id="{A7EAB04C-8910-4AD3-B609-D6829ABEC16F}" type="datetimeFigureOut">
+            <a:fld id="{4A9B9AD0-D4D9-4C2F-B6B6-248A9459F804}" type="datetimeFigureOut">
               <a:rPr lang="de-DE" smtClean="0"/>
               <a:t>08.10.2026</a:t>
             </a:fld>
@@ -2679,7 +2680,7 @@
           <p:cNvPr id="6" name="Fußzeilenplatzhalter 5">
             <a:extLst>
               <a:ext uri="{FF2B5EF4-FFF2-40B4-BE49-F238E27FC236}">
-                <a16:creationId xmlns:a16="http://schemas.microsoft.com/office/drawing/2014/main" id="{84926296-8351-5485-4300-03338EEC4E7E}"/>
+                <a16:creationId xmlns:a16="http://schemas.microsoft.com/office/drawing/2014/main" id="{54AE1CD6-9016-960D-AE2C-F072860DE395}"/>
               </a:ext>
             </a:extLst>
           </p:cNvPr>
@@ -2704,7 +2705,7 @@
           <p:cNvPr id="7" name="Foliennummernplatzhalter 6">
             <a:extLst>
               <a:ext uri="{FF2B5EF4-FFF2-40B4-BE49-F238E27FC236}">
-                <a16:creationId xmlns:a16="http://schemas.microsoft.com/office/drawing/2014/main" id="{494E0E06-B17C-7A10-09DC-7EBF93EECBEA}"/>
+                <a16:creationId xmlns:a16="http://schemas.microsoft.com/office/drawing/2014/main" id="{FE144F9B-78CC-E83C-4BD6-7C70B2EB8583}"/>
               </a:ext>
             </a:extLst>
           </p:cNvPr>
@@ -2720,7 +2721,7 @@
           <a:bodyPr/>
           <a:lstStyle/>
           <a:p>
-            <a:fld id="{8B055827-EE37-4425-A60A-F41882E0FFD2}" type="slidenum">
+            <a:fld id="{607F7310-B502-4DF7-B279-3C8C8F95364A}" type="slidenum">
               <a:rPr lang="de-DE" smtClean="0"/>
               <a:t>‹Nr.›</a:t>
             </a:fld>
@@ -2731,7 +2732,7 @@
     </p:spTree>
     <p:extLst>
       <p:ext uri="{BB962C8B-B14F-4D97-AF65-F5344CB8AC3E}">
-        <p14:creationId xmlns:p14="http://schemas.microsoft.com/office/powerpoint/2010/main" val="602827579"/>
+        <p14:creationId xmlns:p14="http://schemas.microsoft.com/office/powerpoint/2010/main" val="2484947889"/>
       </p:ext>
     </p:extLst>
   </p:cSld>
@@ -2768,7 +2769,7 @@
           <p:cNvPr id="2" name="Titelplatzhalter 1">
             <a:extLst>
               <a:ext uri="{FF2B5EF4-FFF2-40B4-BE49-F238E27FC236}">
-                <a16:creationId xmlns:a16="http://schemas.microsoft.com/office/drawing/2014/main" id="{FC02FBF0-15BE-5798-48F1-792C8B6E0524}"/>
+                <a16:creationId xmlns:a16="http://schemas.microsoft.com/office/drawing/2014/main" id="{8F6FD73C-E9C0-3530-F638-DEE5FB91FCE0}"/>
               </a:ext>
             </a:extLst>
           </p:cNvPr>
@@ -2806,7 +2807,7 @@
           <p:cNvPr id="3" name="Textplatzhalter 2">
             <a:extLst>
               <a:ext uri="{FF2B5EF4-FFF2-40B4-BE49-F238E27FC236}">
-                <a16:creationId xmlns:a16="http://schemas.microsoft.com/office/drawing/2014/main" id="{5FAA8149-6F27-76EC-D379-C2CD6E21E311}"/>
+                <a16:creationId xmlns:a16="http://schemas.microsoft.com/office/drawing/2014/main" id="{0E9A84A4-0E93-2B82-EC74-9643FE0CE38E}"/>
               </a:ext>
             </a:extLst>
           </p:cNvPr>
@@ -2873,7 +2874,7 @@
           <p:cNvPr id="4" name="Datumsplatzhalter 3">
             <a:extLst>
               <a:ext uri="{FF2B5EF4-FFF2-40B4-BE49-F238E27FC236}">
-                <a16:creationId xmlns:a16="http://schemas.microsoft.com/office/drawing/2014/main" id="{943E66F1-33F5-94A8-CE95-1042B7BFF2FE}"/>
+                <a16:creationId xmlns:a16="http://schemas.microsoft.com/office/drawing/2014/main" id="{401ACBED-E265-1994-FABA-7E5DF0A41508}"/>
               </a:ext>
             </a:extLst>
           </p:cNvPr>
@@ -2907,7 +2908,7 @@
             </a:lvl1pPr>
           </a:lstStyle>
           <a:p>
-            <a:fld id="{A7EAB04C-8910-4AD3-B609-D6829ABEC16F}" type="datetimeFigureOut">
+            <a:fld id="{4A9B9AD0-D4D9-4C2F-B6B6-248A9459F804}" type="datetimeFigureOut">
               <a:rPr lang="de-DE" smtClean="0"/>
               <a:t>08.10.2026</a:t>
             </a:fld>
@@ -2920,7 +2921,7 @@
           <p:cNvPr id="5" name="Fußzeilenplatzhalter 4">
             <a:extLst>
               <a:ext uri="{FF2B5EF4-FFF2-40B4-BE49-F238E27FC236}">
-                <a16:creationId xmlns:a16="http://schemas.microsoft.com/office/drawing/2014/main" id="{0A1854D7-6863-3F10-BA7F-5CC5BD292C96}"/>
+                <a16:creationId xmlns:a16="http://schemas.microsoft.com/office/drawing/2014/main" id="{8458FF3B-6114-E65F-5D45-7A3F78143F77}"/>
               </a:ext>
             </a:extLst>
           </p:cNvPr>
@@ -2963,7 +2964,7 @@
           <p:cNvPr id="6" name="Foliennummernplatzhalter 5">
             <a:extLst>
               <a:ext uri="{FF2B5EF4-FFF2-40B4-BE49-F238E27FC236}">
-                <a16:creationId xmlns:a16="http://schemas.microsoft.com/office/drawing/2014/main" id="{78465519-15C8-BDD7-B35C-269C075DE9D8}"/>
+                <a16:creationId xmlns:a16="http://schemas.microsoft.com/office/drawing/2014/main" id="{EA07992C-C5D6-67AA-0389-AF67A3B6CAD4}"/>
               </a:ext>
             </a:extLst>
           </p:cNvPr>
@@ -2997,7 +2998,7 @@
             </a:lvl1pPr>
           </a:lstStyle>
           <a:p>
-            <a:fld id="{8B055827-EE37-4425-A60A-F41882E0FFD2}" type="slidenum">
+            <a:fld id="{607F7310-B502-4DF7-B279-3C8C8F95364A}" type="slidenum">
               <a:rPr lang="de-DE" smtClean="0"/>
               <a:t>‹Nr.›</a:t>
             </a:fld>
@@ -3008,7 +3009,7 @@
     </p:spTree>
     <p:extLst>
       <p:ext uri="{BB962C8B-B14F-4D97-AF65-F5344CB8AC3E}">
-        <p14:creationId xmlns:p14="http://schemas.microsoft.com/office/powerpoint/2010/main" val="2697843253"/>
+        <p14:creationId xmlns:p14="http://schemas.microsoft.com/office/powerpoint/2010/main" val="3356265541"/>
       </p:ext>
     </p:extLst>
   </p:cSld>
@@ -3331,7 +3332,7 @@
           <p:cNvPr id="2" name="Rechteck 1">
             <a:extLst>
               <a:ext uri="{FF2B5EF4-FFF2-40B4-BE49-F238E27FC236}">
-                <a16:creationId xmlns:a16="http://schemas.microsoft.com/office/drawing/2014/main" id="{F23BBE9F-EB97-3C3F-D121-FD639B30A33B}"/>
+                <a16:creationId xmlns:a16="http://schemas.microsoft.com/office/drawing/2014/main" id="{6FB90F08-1995-6FD4-DC93-8A924DF76546}"/>
               </a:ext>
             </a:extLst>
           </p:cNvPr>
@@ -3403,7 +3404,7 @@
           <p:cNvPr id="3" name="Rechteck 2">
             <a:extLst>
               <a:ext uri="{FF2B5EF4-FFF2-40B4-BE49-F238E27FC236}">
-                <a16:creationId xmlns:a16="http://schemas.microsoft.com/office/drawing/2014/main" id="{1FA6FB05-5EAC-5C00-22F0-AFE8B8824DFA}"/>
+                <a16:creationId xmlns:a16="http://schemas.microsoft.com/office/drawing/2014/main" id="{D24FC165-B9D9-E7E8-B797-B323D71D603C}"/>
               </a:ext>
             </a:extLst>
           </p:cNvPr>
@@ -3475,7 +3476,7 @@
           <p:cNvPr id="4" name="Rechteck 3">
             <a:extLst>
               <a:ext uri="{FF2B5EF4-FFF2-40B4-BE49-F238E27FC236}">
-                <a16:creationId xmlns:a16="http://schemas.microsoft.com/office/drawing/2014/main" id="{723A9BA6-BE0F-9444-9825-CCC1A1AED962}"/>
+                <a16:creationId xmlns:a16="http://schemas.microsoft.com/office/drawing/2014/main" id="{C9FCFC0C-A13D-2B5D-2AD9-D6E4DDC12869}"/>
               </a:ext>
             </a:extLst>
           </p:cNvPr>
@@ -3547,7 +3548,7 @@
           <p:cNvPr id="5" name="Rechteck 4">
             <a:extLst>
               <a:ext uri="{FF2B5EF4-FFF2-40B4-BE49-F238E27FC236}">
-                <a16:creationId xmlns:a16="http://schemas.microsoft.com/office/drawing/2014/main" id="{ECD14DD9-CDDD-EC83-80A9-B185FC84415D}"/>
+                <a16:creationId xmlns:a16="http://schemas.microsoft.com/office/drawing/2014/main" id="{E73B63D4-081E-E1FC-473C-5703307107CE}"/>
               </a:ext>
             </a:extLst>
           </p:cNvPr>
@@ -3617,7 +3618,7 @@
           <p:cNvPr id="6" name="Rechteck 5">
             <a:extLst>
               <a:ext uri="{FF2B5EF4-FFF2-40B4-BE49-F238E27FC236}">
-                <a16:creationId xmlns:a16="http://schemas.microsoft.com/office/drawing/2014/main" id="{0106C833-766B-845A-1EF6-AC45A4221ABC}"/>
+                <a16:creationId xmlns:a16="http://schemas.microsoft.com/office/drawing/2014/main" id="{E7B9A645-3437-12D5-E4CE-0CA0283D6361}"/>
               </a:ext>
             </a:extLst>
           </p:cNvPr>
@@ -3687,7 +3688,7 @@
           <p:cNvPr id="7" name="Rechteck 6">
             <a:extLst>
               <a:ext uri="{FF2B5EF4-FFF2-40B4-BE49-F238E27FC236}">
-                <a16:creationId xmlns:a16="http://schemas.microsoft.com/office/drawing/2014/main" id="{D174520D-04A2-FB4C-4183-D034EBA40514}"/>
+                <a16:creationId xmlns:a16="http://schemas.microsoft.com/office/drawing/2014/main" id="{EE4B47E2-351B-AA1B-4399-BD549C59552E}"/>
               </a:ext>
             </a:extLst>
           </p:cNvPr>
@@ -3755,7 +3756,7 @@
     </p:spTree>
     <p:extLst>
       <p:ext uri="{BB962C8B-B14F-4D97-AF65-F5344CB8AC3E}">
-        <p14:creationId xmlns:p14="http://schemas.microsoft.com/office/powerpoint/2010/main" val="61825061"/>
+        <p14:creationId xmlns:p14="http://schemas.microsoft.com/office/powerpoint/2010/main" val="2865047974"/>
       </p:ext>
     </p:extLst>
   </p:cSld>
@@ -3787,7 +3788,7 @@
           <p:cNvPr id="2" name="Rechteck 1">
             <a:extLst>
               <a:ext uri="{FF2B5EF4-FFF2-40B4-BE49-F238E27FC236}">
-                <a16:creationId xmlns:a16="http://schemas.microsoft.com/office/drawing/2014/main" id="{885E43C0-6AA3-30CE-111A-A61DCC25E37E}"/>
+                <a16:creationId xmlns:a16="http://schemas.microsoft.com/office/drawing/2014/main" id="{3DC6718B-1F66-36FC-F0AC-C0B73B349468}"/>
               </a:ext>
             </a:extLst>
           </p:cNvPr>
@@ -3853,7 +3854,7 @@
           <p:cNvPr id="3" name="Rechteck 2">
             <a:extLst>
               <a:ext uri="{FF2B5EF4-FFF2-40B4-BE49-F238E27FC236}">
-                <a16:creationId xmlns:a16="http://schemas.microsoft.com/office/drawing/2014/main" id="{16C2D3E4-59CD-8AE9-D72E-4161D49D59AF}"/>
+                <a16:creationId xmlns:a16="http://schemas.microsoft.com/office/drawing/2014/main" id="{63391362-442E-AC6C-CA28-7999BABC4D5F}"/>
               </a:ext>
             </a:extLst>
           </p:cNvPr>
@@ -3919,7 +3920,7 @@
           <p:cNvPr id="4" name="Rechteck 3">
             <a:extLst>
               <a:ext uri="{FF2B5EF4-FFF2-40B4-BE49-F238E27FC236}">
-                <a16:creationId xmlns:a16="http://schemas.microsoft.com/office/drawing/2014/main" id="{4927FD7D-A580-3BDA-6207-89731518C975}"/>
+                <a16:creationId xmlns:a16="http://schemas.microsoft.com/office/drawing/2014/main" id="{48C410FD-7CC1-6F50-6009-CD38CDF5A4F9}"/>
               </a:ext>
             </a:extLst>
           </p:cNvPr>
@@ -3988,7 +3989,7 @@
           <p:cNvPr id="5" name="Rechteck 4">
             <a:extLst>
               <a:ext uri="{FF2B5EF4-FFF2-40B4-BE49-F238E27FC236}">
-                <a16:creationId xmlns:a16="http://schemas.microsoft.com/office/drawing/2014/main" id="{00D4B47F-32CB-4E24-CED7-5901B0A4F684}"/>
+                <a16:creationId xmlns:a16="http://schemas.microsoft.com/office/drawing/2014/main" id="{9E23CFD5-4FAC-67B1-7738-F3AD57B4577E}"/>
               </a:ext>
             </a:extLst>
           </p:cNvPr>
@@ -4057,7 +4058,7 @@
           <p:cNvPr id="6" name="Rechteck 5">
             <a:extLst>
               <a:ext uri="{FF2B5EF4-FFF2-40B4-BE49-F238E27FC236}">
-                <a16:creationId xmlns:a16="http://schemas.microsoft.com/office/drawing/2014/main" id="{D03B9718-61D6-0E83-3353-1AADD37AA19E}"/>
+                <a16:creationId xmlns:a16="http://schemas.microsoft.com/office/drawing/2014/main" id="{A38A120F-08F9-7049-3A86-F8E44529EB58}"/>
               </a:ext>
             </a:extLst>
           </p:cNvPr>
@@ -4124,7 +4125,7 @@
     </p:spTree>
     <p:extLst>
       <p:ext uri="{BB962C8B-B14F-4D97-AF65-F5344CB8AC3E}">
-        <p14:creationId xmlns:p14="http://schemas.microsoft.com/office/powerpoint/2010/main" val="2223191478"/>
+        <p14:creationId xmlns:p14="http://schemas.microsoft.com/office/powerpoint/2010/main" val="872230267"/>
       </p:ext>
     </p:extLst>
   </p:cSld>
@@ -4156,7 +4157,7 @@
           <p:cNvPr id="2" name="Rechteck 1">
             <a:extLst>
               <a:ext uri="{FF2B5EF4-FFF2-40B4-BE49-F238E27FC236}">
-                <a16:creationId xmlns:a16="http://schemas.microsoft.com/office/drawing/2014/main" id="{57AA9D93-F385-4FD9-B8B3-524F230CB149}"/>
+                <a16:creationId xmlns:a16="http://schemas.microsoft.com/office/drawing/2014/main" id="{7A7574EA-5575-E6A6-E776-72CF401E7C75}"/>
               </a:ext>
             </a:extLst>
           </p:cNvPr>
@@ -4217,7 +4218,7 @@
           <p:cNvPr id="3" name="Rechteck 2">
             <a:extLst>
               <a:ext uri="{FF2B5EF4-FFF2-40B4-BE49-F238E27FC236}">
-                <a16:creationId xmlns:a16="http://schemas.microsoft.com/office/drawing/2014/main" id="{06BF208D-C891-CB0D-6487-2A2CE62D7E9D}"/>
+                <a16:creationId xmlns:a16="http://schemas.microsoft.com/office/drawing/2014/main" id="{5396E443-CAF0-5C94-83E2-93F58437B51B}"/>
               </a:ext>
             </a:extLst>
           </p:cNvPr>
@@ -4276,7 +4277,7 @@
     </p:spTree>
     <p:extLst>
       <p:ext uri="{BB962C8B-B14F-4D97-AF65-F5344CB8AC3E}">
-        <p14:creationId xmlns:p14="http://schemas.microsoft.com/office/powerpoint/2010/main" val="3535756975"/>
+        <p14:creationId xmlns:p14="http://schemas.microsoft.com/office/powerpoint/2010/main" val="629606694"/>
       </p:ext>
     </p:extLst>
   </p:cSld>
@@ -4308,7 +4309,7 @@
           <p:cNvPr id="2" name="Rechteck 1">
             <a:extLst>
               <a:ext uri="{FF2B5EF4-FFF2-40B4-BE49-F238E27FC236}">
-                <a16:creationId xmlns:a16="http://schemas.microsoft.com/office/drawing/2014/main" id="{D5CEF53C-1A38-79AC-2028-230BE0F2A81C}"/>
+                <a16:creationId xmlns:a16="http://schemas.microsoft.com/office/drawing/2014/main" id="{7207A1B4-58D4-10ED-0F85-80A22AC2A6AA}"/>
               </a:ext>
             </a:extLst>
           </p:cNvPr>
@@ -4371,7 +4372,7 @@
           <p:cNvPr id="3" name="Rechteck 2">
             <a:extLst>
               <a:ext uri="{FF2B5EF4-FFF2-40B4-BE49-F238E27FC236}">
-                <a16:creationId xmlns:a16="http://schemas.microsoft.com/office/drawing/2014/main" id="{108C8774-63DC-591C-1E59-FF1FB65D7033}"/>
+                <a16:creationId xmlns:a16="http://schemas.microsoft.com/office/drawing/2014/main" id="{3B7C940F-5865-1982-9026-2A2FD492697C}"/>
               </a:ext>
             </a:extLst>
           </p:cNvPr>
@@ -4434,7 +4435,7 @@
           <p:cNvPr id="4" name="Rechteck 3">
             <a:extLst>
               <a:ext uri="{FF2B5EF4-FFF2-40B4-BE49-F238E27FC236}">
-                <a16:creationId xmlns:a16="http://schemas.microsoft.com/office/drawing/2014/main" id="{526A0717-3A2E-313F-2441-962AD12E3F74}"/>
+                <a16:creationId xmlns:a16="http://schemas.microsoft.com/office/drawing/2014/main" id="{B22B0988-C4B7-2601-8FD8-82A6CEE12C49}"/>
               </a:ext>
             </a:extLst>
           </p:cNvPr>
@@ -4497,7 +4498,7 @@
           <p:cNvPr id="5" name="Rechteck 4">
             <a:extLst>
               <a:ext uri="{FF2B5EF4-FFF2-40B4-BE49-F238E27FC236}">
-                <a16:creationId xmlns:a16="http://schemas.microsoft.com/office/drawing/2014/main" id="{6F124AC3-1886-EE2C-A6F0-2265320711E6}"/>
+                <a16:creationId xmlns:a16="http://schemas.microsoft.com/office/drawing/2014/main" id="{40A31FBF-75F7-9CA2-C012-D46222EF472F}"/>
               </a:ext>
             </a:extLst>
           </p:cNvPr>
@@ -4561,7 +4562,7 @@
     </p:spTree>
     <p:extLst>
       <p:ext uri="{BB962C8B-B14F-4D97-AF65-F5344CB8AC3E}">
-        <p14:creationId xmlns:p14="http://schemas.microsoft.com/office/powerpoint/2010/main" val="3964996417"/>
+        <p14:creationId xmlns:p14="http://schemas.microsoft.com/office/powerpoint/2010/main" val="3490690117"/>
       </p:ext>
     </p:extLst>
   </p:cSld>
@@ -4593,7 +4594,7 @@
           <p:cNvPr id="2" name="fontAlgn-t">
             <a:extLst>
               <a:ext uri="{FF2B5EF4-FFF2-40B4-BE49-F238E27FC236}">
-                <a16:creationId xmlns:a16="http://schemas.microsoft.com/office/drawing/2014/main" id="{DB308640-B912-31D0-4019-8E9D1404A244}"/>
+                <a16:creationId xmlns:a16="http://schemas.microsoft.com/office/drawing/2014/main" id="{44E1713E-ACF0-3C0C-C857-EFFD84E49288}"/>
               </a:ext>
             </a:extLst>
           </p:cNvPr>
@@ -4678,7 +4679,7 @@
           <p:cNvPr id="3" name="fontAlgn-ctr">
             <a:extLst>
               <a:ext uri="{FF2B5EF4-FFF2-40B4-BE49-F238E27FC236}">
-                <a16:creationId xmlns:a16="http://schemas.microsoft.com/office/drawing/2014/main" id="{BC754AD8-4AA3-14C8-41DB-38EDD423EFCE}"/>
+                <a16:creationId xmlns:a16="http://schemas.microsoft.com/office/drawing/2014/main" id="{6F168ED1-C68C-00E2-30A0-4BF622E89BE3}"/>
               </a:ext>
             </a:extLst>
           </p:cNvPr>
@@ -4763,7 +4764,7 @@
           <p:cNvPr id="4" name="fontAlgn-b">
             <a:extLst>
               <a:ext uri="{FF2B5EF4-FFF2-40B4-BE49-F238E27FC236}">
-                <a16:creationId xmlns:a16="http://schemas.microsoft.com/office/drawing/2014/main" id="{82F2B2CB-7718-AC43-678D-EB407CC2F757}"/>
+                <a16:creationId xmlns:a16="http://schemas.microsoft.com/office/drawing/2014/main" id="{EA64864E-DCF4-6B9D-FEF3-39B72A92330A}"/>
               </a:ext>
             </a:extLst>
           </p:cNvPr>
@@ -4848,7 +4849,7 @@
           <p:cNvPr id="5" name="fontAlgn-base">
             <a:extLst>
               <a:ext uri="{FF2B5EF4-FFF2-40B4-BE49-F238E27FC236}">
-                <a16:creationId xmlns:a16="http://schemas.microsoft.com/office/drawing/2014/main" id="{2EB6AA2B-E8D9-2571-FB1F-7116932B73CA}"/>
+                <a16:creationId xmlns:a16="http://schemas.microsoft.com/office/drawing/2014/main" id="{67541AE4-D9C3-89CD-2B3D-A2EE960366A8}"/>
               </a:ext>
             </a:extLst>
           </p:cNvPr>
@@ -4933,7 +4934,7 @@
           <p:cNvPr id="6" name="arch-wordart">
             <a:extLst>
               <a:ext uri="{FF2B5EF4-FFF2-40B4-BE49-F238E27FC236}">
-                <a16:creationId xmlns:a16="http://schemas.microsoft.com/office/drawing/2014/main" id="{B37779C4-D6ED-519B-BFD6-CE2315BB1287}"/>
+                <a16:creationId xmlns:a16="http://schemas.microsoft.com/office/drawing/2014/main" id="{5A404763-3024-C8AE-12D0-689D0F74ABD8}"/>
               </a:ext>
             </a:extLst>
           </p:cNvPr>
@@ -4997,7 +4998,7 @@
           <p:cNvPr id="7" name="arch">
             <a:extLst>
               <a:ext uri="{FF2B5EF4-FFF2-40B4-BE49-F238E27FC236}">
-                <a16:creationId xmlns:a16="http://schemas.microsoft.com/office/drawing/2014/main" id="{255C4EDF-A772-8A89-6936-1B0ED438598D}"/>
+                <a16:creationId xmlns:a16="http://schemas.microsoft.com/office/drawing/2014/main" id="{A14F8941-0BC1-2DD6-1915-26ACA5133651}"/>
               </a:ext>
             </a:extLst>
           </p:cNvPr>
@@ -5059,7 +5060,7 @@
     </p:spTree>
     <p:extLst>
       <p:ext uri="{BB962C8B-B14F-4D97-AF65-F5344CB8AC3E}">
-        <p14:creationId xmlns:p14="http://schemas.microsoft.com/office/powerpoint/2010/main" val="3228572274"/>
+        <p14:creationId xmlns:p14="http://schemas.microsoft.com/office/powerpoint/2010/main" val="1215147968"/>
       </p:ext>
     </p:extLst>
   </p:cSld>
@@ -5091,7 +5092,7 @@
           <p:cNvPr id="2" name="ellipsis">
             <a:extLst>
               <a:ext uri="{FF2B5EF4-FFF2-40B4-BE49-F238E27FC236}">
-                <a16:creationId xmlns:a16="http://schemas.microsoft.com/office/drawing/2014/main" id="{DD01823F-6E73-5DF5-1E1E-361753D65F44}"/>
+                <a16:creationId xmlns:a16="http://schemas.microsoft.com/office/drawing/2014/main" id="{4D0D36C5-20F9-3562-A19A-83E5FE7BCA56}"/>
               </a:ext>
             </a:extLst>
           </p:cNvPr>
@@ -5152,7 +5153,7 @@
           <p:cNvPr id="3" name="clip">
             <a:extLst>
               <a:ext uri="{FF2B5EF4-FFF2-40B4-BE49-F238E27FC236}">
-                <a16:creationId xmlns:a16="http://schemas.microsoft.com/office/drawing/2014/main" id="{931A79E0-49D1-5BE7-A04E-79009C4EB20A}"/>
+                <a16:creationId xmlns:a16="http://schemas.microsoft.com/office/drawing/2014/main" id="{E022A255-266A-75F5-CAD3-5B7D03D5B151}"/>
               </a:ext>
             </a:extLst>
           </p:cNvPr>
@@ -5213,7 +5214,7 @@
           <p:cNvPr id="4" name="overflow">
             <a:extLst>
               <a:ext uri="{FF2B5EF4-FFF2-40B4-BE49-F238E27FC236}">
-                <a16:creationId xmlns:a16="http://schemas.microsoft.com/office/drawing/2014/main" id="{62B73280-C369-40EF-60A3-5349C8151F11}"/>
+                <a16:creationId xmlns:a16="http://schemas.microsoft.com/office/drawing/2014/main" id="{79C25E2B-5394-EC7C-9ED6-FDA625A2EADA}"/>
               </a:ext>
             </a:extLst>
           </p:cNvPr>
@@ -5274,7 +5275,7 @@
           <p:cNvPr id="5" name="horzClip">
             <a:extLst>
               <a:ext uri="{FF2B5EF4-FFF2-40B4-BE49-F238E27FC236}">
-                <a16:creationId xmlns:a16="http://schemas.microsoft.com/office/drawing/2014/main" id="{5F1822DB-4638-DED9-2B7E-8DC1081C00A7}"/>
+                <a16:creationId xmlns:a16="http://schemas.microsoft.com/office/drawing/2014/main" id="{FCCAD01E-9539-2560-A860-FC9ECE1E1F10}"/>
               </a:ext>
             </a:extLst>
           </p:cNvPr>
@@ -5335,7 +5336,7 @@
           <p:cNvPr id="6" name="spcFirstLast-t">
             <a:extLst>
               <a:ext uri="{FF2B5EF4-FFF2-40B4-BE49-F238E27FC236}">
-                <a16:creationId xmlns:a16="http://schemas.microsoft.com/office/drawing/2014/main" id="{0CB7207F-1CE5-A06A-5D9F-1B37FB97D6D7}"/>
+                <a16:creationId xmlns:a16="http://schemas.microsoft.com/office/drawing/2014/main" id="{BF5E7F2E-6A84-6F5E-BE9E-AFE4271BA12E}"/>
               </a:ext>
             </a:extLst>
           </p:cNvPr>
@@ -5415,7 +5416,7 @@
           <p:cNvPr id="7" name="spcFirstLast-b">
             <a:extLst>
               <a:ext uri="{FF2B5EF4-FFF2-40B4-BE49-F238E27FC236}">
-                <a16:creationId xmlns:a16="http://schemas.microsoft.com/office/drawing/2014/main" id="{338F7348-5A9C-01AA-BD86-02E29D9D31C5}"/>
+                <a16:creationId xmlns:a16="http://schemas.microsoft.com/office/drawing/2014/main" id="{E4338C82-DEFA-7F5E-BEA6-2EDC1CD6B3C0}"/>
               </a:ext>
             </a:extLst>
           </p:cNvPr>
@@ -5495,7 +5496,7 @@
           <p:cNvPr id="8" name="spcDefault-b">
             <a:extLst>
               <a:ext uri="{FF2B5EF4-FFF2-40B4-BE49-F238E27FC236}">
-                <a16:creationId xmlns:a16="http://schemas.microsoft.com/office/drawing/2014/main" id="{1CECB375-6554-10FE-D391-AADB48C3C617}"/>
+                <a16:creationId xmlns:a16="http://schemas.microsoft.com/office/drawing/2014/main" id="{5B6FDFC4-4A53-00B5-F936-A33990492728}"/>
               </a:ext>
             </a:extLst>
           </p:cNvPr>
@@ -5573,7 +5574,259 @@
     </p:spTree>
     <p:extLst>
       <p:ext uri="{BB962C8B-B14F-4D97-AF65-F5344CB8AC3E}">
-        <p14:creationId xmlns:p14="http://schemas.microsoft.com/office/powerpoint/2010/main" val="1605635974"/>
+        <p14:creationId xmlns:p14="http://schemas.microsoft.com/office/powerpoint/2010/main" val="1521223506"/>
+      </p:ext>
+    </p:extLst>
+  </p:cSld>
+  <p:clrMapOvr>
+    <a:masterClrMapping/>
+  </p:clrMapOvr>
+</p:sld>
+</file>
+
+<file path=ppt/slides/slide7.xml><?xml version="1.0" encoding="utf-8"?>
+<p:sld xmlns:a="http://schemas.openxmlformats.org/drawingml/2006/main" xmlns:r="http://schemas.openxmlformats.org/officeDocument/2006/relationships" xmlns:p="http://schemas.openxmlformats.org/presentationml/2006/main">
+  <p:cSld>
+    <p:spTree>
+      <p:nvGrpSpPr>
+        <p:cNvPr id="1" name=""/>
+        <p:cNvGrpSpPr/>
+        <p:nvPr/>
+      </p:nvGrpSpPr>
+      <p:grpSpPr>
+        <a:xfrm>
+          <a:off x="0" y="0"/>
+          <a:ext cx="0" cy="0"/>
+          <a:chOff x="0" y="0"/>
+          <a:chExt cx="0" cy="0"/>
+        </a:xfrm>
+      </p:grpSpPr>
+      <p:sp>
+        <p:nvSpPr>
+          <p:cNvPr id="2" name="missing-font-0">
+            <a:extLst>
+              <a:ext uri="{FF2B5EF4-FFF2-40B4-BE49-F238E27FC236}">
+                <a16:creationId xmlns:a16="http://schemas.microsoft.com/office/drawing/2014/main" id="{B6CC71E9-4B6A-AE7D-E086-C0572591E12E}"/>
+              </a:ext>
+            </a:extLst>
+          </p:cNvPr>
+          <p:cNvSpPr txBox="1"/>
+          <p:nvPr/>
+        </p:nvSpPr>
+        <p:spPr>
+          <a:xfrm>
+            <a:off x="508000" y="508000"/>
+            <a:ext cx="5588000" cy="954107"/>
+          </a:xfrm>
+          <a:prstGeom prst="rect">
+            <a:avLst/>
+          </a:prstGeom>
+          <a:noFill/>
+        </p:spPr>
+        <p:txBody>
+          <a:bodyPr vert="horz" rtlCol="0">
+            <a:spAutoFit/>
+          </a:bodyPr>
+          <a:lstStyle/>
+          <a:p>
+            <a:r>
+              <a:rPr lang="de-DE" sz="2800">
+                <a:latin xmlns:a="http://schemas.openxmlformats.org/drawingml/2006/main" typeface="Zzz Serif Missing" panose="02020603050405020304" pitchFamily="18" charset="0"/>
+              </a:rPr>
+              <a:t>Hamburgefonts Quick 0123 iiiWWW</a:t>
+            </a:r>
+          </a:p>
+        </p:txBody>
+      </p:sp>
+      <p:sp>
+        <p:nvSpPr>
+          <p:cNvPr id="3" name="missing-font-1">
+            <a:extLst>
+              <a:ext uri="{FF2B5EF4-FFF2-40B4-BE49-F238E27FC236}">
+                <a16:creationId xmlns:a16="http://schemas.microsoft.com/office/drawing/2014/main" id="{88B829E5-69F9-2DC9-ACD2-D7817C69967A}"/>
+              </a:ext>
+            </a:extLst>
+          </p:cNvPr>
+          <p:cNvSpPr txBox="1"/>
+          <p:nvPr/>
+        </p:nvSpPr>
+        <p:spPr>
+          <a:xfrm>
+            <a:off x="6350000" y="508000"/>
+            <a:ext cx="5588000" cy="954107"/>
+          </a:xfrm>
+          <a:prstGeom prst="rect">
+            <a:avLst/>
+          </a:prstGeom>
+          <a:noFill/>
+        </p:spPr>
+        <p:txBody>
+          <a:bodyPr vert="horz" rtlCol="0">
+            <a:spAutoFit/>
+          </a:bodyPr>
+          <a:lstStyle/>
+          <a:p>
+            <a:r>
+              <a:rPr lang="de-DE" sz="2800">
+                <a:latin xmlns:a="http://schemas.openxmlformats.org/drawingml/2006/main" typeface="Zzz Mono Missing" panose="02070309020205020404" pitchFamily="49" charset="0"/>
+              </a:rPr>
+              <a:t>Hamburgefonts Quick 0123 iiiWWW</a:t>
+            </a:r>
+          </a:p>
+        </p:txBody>
+      </p:sp>
+      <p:sp>
+        <p:nvSpPr>
+          <p:cNvPr id="4" name="missing-font-2">
+            <a:extLst>
+              <a:ext uri="{FF2B5EF4-FFF2-40B4-BE49-F238E27FC236}">
+                <a16:creationId xmlns:a16="http://schemas.microsoft.com/office/drawing/2014/main" id="{C586E4D8-3C98-3302-7843-29CC61E7E639}"/>
+              </a:ext>
+            </a:extLst>
+          </p:cNvPr>
+          <p:cNvSpPr txBox="1"/>
+          <p:nvPr/>
+        </p:nvSpPr>
+        <p:spPr>
+          <a:xfrm>
+            <a:off x="508000" y="2540000"/>
+            <a:ext cx="5588000" cy="954107"/>
+          </a:xfrm>
+          <a:prstGeom prst="rect">
+            <a:avLst/>
+          </a:prstGeom>
+          <a:noFill/>
+        </p:spPr>
+        <p:txBody>
+          <a:bodyPr vert="horz" rtlCol="0">
+            <a:spAutoFit/>
+          </a:bodyPr>
+          <a:lstStyle/>
+          <a:p>
+            <a:r>
+              <a:rPr lang="de-DE" sz="2800">
+                <a:latin xmlns:a="http://schemas.openxmlformats.org/drawingml/2006/main" typeface="Zzz Sans Missing" panose="020B0604020202020204" pitchFamily="34" charset="0"/>
+              </a:rPr>
+              <a:t>Hamburgefonts Quick 0123 iiiWWW</a:t>
+            </a:r>
+          </a:p>
+        </p:txBody>
+      </p:sp>
+      <p:sp>
+        <p:nvSpPr>
+          <p:cNvPr id="5" name="missing-font-3">
+            <a:extLst>
+              <a:ext uri="{FF2B5EF4-FFF2-40B4-BE49-F238E27FC236}">
+                <a16:creationId xmlns:a16="http://schemas.microsoft.com/office/drawing/2014/main" id="{D089AC9D-1715-AAFB-3C7B-6B14E1D2EBF2}"/>
+              </a:ext>
+            </a:extLst>
+          </p:cNvPr>
+          <p:cNvSpPr txBox="1"/>
+          <p:nvPr/>
+        </p:nvSpPr>
+        <p:spPr>
+          <a:xfrm>
+            <a:off x="6350000" y="2540000"/>
+            <a:ext cx="5588000" cy="954107"/>
+          </a:xfrm>
+          <a:prstGeom prst="rect">
+            <a:avLst/>
+          </a:prstGeom>
+          <a:noFill/>
+        </p:spPr>
+        <p:txBody>
+          <a:bodyPr vert="horz" rtlCol="0">
+            <a:spAutoFit/>
+          </a:bodyPr>
+          <a:lstStyle/>
+          <a:p>
+            <a:r>
+              <a:rPr lang="de-DE" sz="2800">
+                <a:latin xmlns:a="http://schemas.openxmlformats.org/drawingml/2006/main" typeface="Zzz Plain Missing"/>
+              </a:rPr>
+              <a:t>Hamburgefonts Quick 0123 iiiWWW</a:t>
+            </a:r>
+          </a:p>
+        </p:txBody>
+      </p:sp>
+      <p:sp>
+        <p:nvSpPr>
+          <p:cNvPr id="6" name="missing-font-4">
+            <a:extLst>
+              <a:ext uri="{FF2B5EF4-FFF2-40B4-BE49-F238E27FC236}">
+                <a16:creationId xmlns:a16="http://schemas.microsoft.com/office/drawing/2014/main" id="{601355E5-D624-C82B-7558-3D1D371AC4F8}"/>
+              </a:ext>
+            </a:extLst>
+          </p:cNvPr>
+          <p:cNvSpPr txBox="1"/>
+          <p:nvPr/>
+        </p:nvSpPr>
+        <p:spPr>
+          <a:xfrm>
+            <a:off x="508000" y="4572000"/>
+            <a:ext cx="5588000" cy="954107"/>
+          </a:xfrm>
+          <a:prstGeom prst="rect">
+            <a:avLst/>
+          </a:prstGeom>
+          <a:noFill/>
+        </p:spPr>
+        <p:txBody>
+          <a:bodyPr vert="horz" rtlCol="0">
+            <a:spAutoFit/>
+          </a:bodyPr>
+          <a:lstStyle/>
+          <a:p>
+            <a:r>
+              <a:rPr lang="de-DE" sz="2800">
+                <a:latin xmlns:a="http://schemas.openxmlformats.org/drawingml/2006/main" typeface="Zzz Script Missing" panose="03010101010101010101" pitchFamily="66"/>
+              </a:rPr>
+              <a:t>Hamburgefonts Quick 0123 iiiWWW</a:t>
+            </a:r>
+          </a:p>
+        </p:txBody>
+      </p:sp>
+      <p:sp>
+        <p:nvSpPr>
+          <p:cNvPr id="7" name="missing-font-5">
+            <a:extLst>
+              <a:ext uri="{FF2B5EF4-FFF2-40B4-BE49-F238E27FC236}">
+                <a16:creationId xmlns:a16="http://schemas.microsoft.com/office/drawing/2014/main" id="{42F4AEC1-CE61-44B8-AB03-39418D0B05F6}"/>
+              </a:ext>
+            </a:extLst>
+          </p:cNvPr>
+          <p:cNvSpPr txBox="1"/>
+          <p:nvPr/>
+        </p:nvSpPr>
+        <p:spPr>
+          <a:xfrm>
+            <a:off x="6350000" y="4572000"/>
+            <a:ext cx="5588000" cy="954107"/>
+          </a:xfrm>
+          <a:prstGeom prst="rect">
+            <a:avLst/>
+          </a:prstGeom>
+          <a:noFill/>
+        </p:spPr>
+        <p:txBody>
+          <a:bodyPr vert="horz" rtlCol="0">
+            <a:spAutoFit/>
+          </a:bodyPr>
+          <a:lstStyle/>
+          <a:p>
+            <a:r>
+              <a:rPr lang="de-DE" sz="2800">
+                <a:latin xmlns:a="http://schemas.openxmlformats.org/drawingml/2006/main" typeface="Zzz Decor Missing" panose="04020705040A02060702" pitchFamily="82"/>
+              </a:rPr>
+              <a:t>Hamburgefonts Quick 0123 iiiWWW</a:t>
+            </a:r>
+          </a:p>
+        </p:txBody>
+      </p:sp>
+    </p:spTree>
+    <p:extLst>
+      <p:ext uri="{BB962C8B-B14F-4D97-AF65-F5344CB8AC3E}">
+        <p14:creationId xmlns:p14="http://schemas.microsoft.com/office/powerpoint/2010/main" val="208545602"/>
       </p:ext>
     </p:extLst>
   </p:cSld>
